--- a/app/examples/fpa_budget/report.pptx
+++ b/app/examples/fpa_budget/report.pptx
@@ -3117,11 +3117,11 @@
             <a:r>
               <a:rPr sz="4600" b="1">
                 <a:solidFill>
-                  <a:srgbClr val="1F2A44"/>
-                </a:solidFill>
-                <a:latin typeface="Georgia"/>
+                  <a:srgbClr val="0C2E27"/>
+                </a:solidFill>
+                <a:latin typeface="Cambria"/>
               </a:rPr>
-              <a:t>May Financial Performance Overview</a:t>
+              <a:t>May Financial Performance Analysis</a:t>
             </a:r>
           </a:p>
         </p:txBody>
@@ -3153,7 +3153,7 @@
                 <a:solidFill>
                   <a:srgbClr val="7A828C"/>
                 </a:solidFill>
-                <a:latin typeface="Arial"/>
+                <a:latin typeface="Calibri"/>
               </a:rPr>
               <a:t>Period 2026-05  |  source table: ex_fpa_budget</a:t>
             </a:r>
@@ -3187,9 +3187,9 @@
                 <a:solidFill>
                   <a:srgbClr val="7A828C"/>
                 </a:solidFill>
-                <a:latin typeface="Arial"/>
+                <a:latin typeface="Calibri"/>
               </a:rPr>
-              <a:t>Generated 2026-06-10 15:44 UTC   |   CONFIDENTIAL</a:t>
+              <a:t>Generated 2026-06-10 17:37 UTC   |   CONFIDENTIAL</a:t>
             </a:r>
           </a:p>
         </p:txBody>
@@ -3237,9 +3237,9 @@
             <a:r>
               <a:rPr sz="1300" b="1">
                 <a:solidFill>
-                  <a:srgbClr val="2E6DB4"/>
-                </a:solidFill>
-                <a:latin typeface="Arial"/>
+                  <a:srgbClr val="0E7C66"/>
+                </a:solidFill>
+                <a:latin typeface="Calibri"/>
               </a:rPr>
               <a:t>EXECUTIVE SUMMARY</a:t>
             </a:r>
@@ -3271,11 +3271,11 @@
             <a:r>
               <a:rPr sz="3000" b="1">
                 <a:solidFill>
-                  <a:srgbClr val="1F2A44"/>
-                </a:solidFill>
-                <a:latin typeface="Georgia"/>
+                  <a:srgbClr val="0C2E27"/>
+                </a:solidFill>
+                <a:latin typeface="Cambria"/>
               </a:rPr>
-              <a:t>Sales remains strong, but Operations faces decline.</a:t>
+              <a:t>Sales remains a strong contributor despite overall decline.</a:t>
             </a:r>
           </a:p>
         </p:txBody>
@@ -3307,7 +3307,7 @@
                 <a:solidFill>
                   <a:srgbClr val="7A828C"/>
                 </a:solidFill>
-                <a:latin typeface="Arial"/>
+                <a:latin typeface="Calibri"/>
               </a:rPr>
               <a:t>Source: figures verified against the source data.</a:t>
             </a:r>
@@ -3344,7 +3344,7 @@
             <a:r>
               <a:rPr sz="1600" b="1">
                 <a:solidFill>
-                  <a:srgbClr val="2E6DB4"/>
+                  <a:srgbClr val="0E7C66"/>
                 </a:solidFill>
               </a:rPr>
               <a:t>●  </a:t>
@@ -3354,9 +3354,9 @@
                 <a:solidFill>
                   <a:srgbClr val="3C4450"/>
                 </a:solidFill>
-                <a:latin typeface="Arial"/>
+                <a:latin typeface="Calibri"/>
               </a:rPr>
-              <a:t>Total actual is $501k in 2026-05, down from $511k in 2026-04.</a:t>
+              <a:t>Total actual is $501k in 2026-05, reflecting a decline of -1.9%.</a:t>
             </a:r>
           </a:p>
           <a:p>
@@ -3368,7 +3368,7 @@
             <a:r>
               <a:rPr sz="1600" b="1">
                 <a:solidFill>
-                  <a:srgbClr val="2E6DB4"/>
+                  <a:srgbClr val="0E7C66"/>
                 </a:solidFill>
               </a:rPr>
               <a:t>●  </a:t>
@@ -3378,7 +3378,7 @@
                 <a:solidFill>
                   <a:srgbClr val="3C4450"/>
                 </a:solidFill>
-                <a:latin typeface="Arial"/>
+                <a:latin typeface="Calibri"/>
               </a:rPr>
               <a:t>Sales leads with $147k, representing 29.3% of total actual.</a:t>
             </a:r>
@@ -3392,7 +3392,7 @@
             <a:r>
               <a:rPr sz="1600" b="1">
                 <a:solidFill>
-                  <a:srgbClr val="2E6DB4"/>
+                  <a:srgbClr val="0E7C66"/>
                 </a:solidFill>
               </a:rPr>
               <a:t>●  </a:t>
@@ -3402,9 +3402,9 @@
                 <a:solidFill>
                   <a:srgbClr val="3C4450"/>
                 </a:solidFill>
-                <a:latin typeface="Arial"/>
+                <a:latin typeface="Calibri"/>
               </a:rPr>
-              <a:t>Operations experienced the largest decline at -$8k compared to prior.</a:t>
+              <a:t>Operations experienced the largest decline at -$8k compared to prior month.</a:t>
             </a:r>
           </a:p>
         </p:txBody>
@@ -3452,9 +3452,9 @@
             <a:r>
               <a:rPr sz="1300" b="1">
                 <a:solidFill>
-                  <a:srgbClr val="2E6DB4"/>
-                </a:solidFill>
-                <a:latin typeface="Arial"/>
+                  <a:srgbClr val="0E7C66"/>
+                </a:solidFill>
+                <a:latin typeface="Calibri"/>
               </a:rPr>
               <a:t>FINANCIAL PERFORMANCE</a:t>
             </a:r>
@@ -3486,11 +3486,11 @@
             <a:r>
               <a:rPr sz="3000" b="1">
                 <a:solidFill>
-                  <a:srgbClr val="1F2A44"/>
-                </a:solidFill>
-                <a:latin typeface="Georgia"/>
+                  <a:srgbClr val="0C2E27"/>
+                </a:solidFill>
+                <a:latin typeface="Cambria"/>
               </a:rPr>
-              <a:t>Actual declined to $501k in May, down $10k from April's peak of $511k.</a:t>
+              <a:t>Actual decreased to $501k in May, down $10k from April's peak of $511k.</a:t>
             </a:r>
           </a:p>
         </p:txBody>
@@ -3522,7 +3522,7 @@
                 <a:solidFill>
                   <a:srgbClr val="7A828C"/>
                 </a:solidFill>
-                <a:latin typeface="Arial"/>
+                <a:latin typeface="Calibri"/>
               </a:rPr>
               <a:t>Source: performance: Monthly actual, verified against the data.</a:t>
             </a:r>
@@ -3580,9 +3580,9 @@
                 <a:solidFill>
                   <a:srgbClr val="7A828C"/>
                 </a:solidFill>
-                <a:latin typeface="Arial"/>
+                <a:latin typeface="Calibri"/>
               </a:rPr>
-              <a:t>In May 2026, actual totaled $501k, reflecting a decrease of $10k or -1.9% compared to April's peak of $511k. This decline follows a recent upward trend, with April marking the highest monthly actual in the past year. Historically, actual has shown seasonal fluctuations, with the highest figures typically occurring in the early months of the year.</a:t>
+              <a:t>In May 2026, actual totaled $501k, reflecting a decrease of $10k or -1.9% compared to April's peak of $511k. This decline marks a slight dip following a strong performance in April, which was the highest month recorded in the past year. The trend over the last 12 months shows fluctuations, with the highest monthly actual consistently around $511k.</a:t>
             </a:r>
           </a:p>
         </p:txBody>
@@ -3602,7 +3602,7 @@
             <a:avLst/>
           </a:prstGeom>
           <a:solidFill>
-            <a:srgbClr val="1F2A44"/>
+            <a:srgbClr val="0C2E27"/>
           </a:solidFill>
           <a:ln>
             <a:noFill/>
@@ -3633,7 +3633,7 @@
                 <a:solidFill>
                   <a:srgbClr val="FFFFFF"/>
                 </a:solidFill>
-                <a:latin typeface="Arial"/>
+                <a:latin typeface="Calibri"/>
               </a:rPr>
               <a:t>KEY TAKEAWAY</a:t>
             </a:r>
@@ -3692,9 +3692,9 @@
                 <a:solidFill>
                   <a:srgbClr val="3C4450"/>
                 </a:solidFill>
-                <a:latin typeface="Arial"/>
+                <a:latin typeface="Calibri"/>
               </a:rPr>
-              <a:t>The decline in May suggests a need to analyze factors affecting monthly performance.</a:t>
+              <a:t>Maintaining focus on sustaining performance is crucial as we navigate post-peak adjustments.</a:t>
             </a:r>
           </a:p>
           <a:p>
@@ -3708,9 +3708,9 @@
                 <a:solidFill>
                   <a:srgbClr val="3C4450"/>
                 </a:solidFill>
-                <a:latin typeface="Arial"/>
+                <a:latin typeface="Calibri"/>
               </a:rPr>
-              <a:t>•  May's actual of $501k is lower than April's $511k peak.</a:t>
+              <a:t>•  May's actual of $501k is below April's peak of $511k.</a:t>
             </a:r>
           </a:p>
           <a:p>
@@ -3724,9 +3724,9 @@
                 <a:solidFill>
                   <a:srgbClr val="3C4450"/>
                 </a:solidFill>
-                <a:latin typeface="Arial"/>
+                <a:latin typeface="Calibri"/>
               </a:rPr>
-              <a:t>•  The trend shows a recent peak in April, followed by a slight decline.</a:t>
+              <a:t>•  The last 12 months show a peak in April 2026.</a:t>
             </a:r>
           </a:p>
           <a:p>
@@ -3740,9 +3740,9 @@
                 <a:solidFill>
                   <a:srgbClr val="3C4450"/>
                 </a:solidFill>
-                <a:latin typeface="Arial"/>
+                <a:latin typeface="Calibri"/>
               </a:rPr>
-              <a:t>•  Year-over-year, actual remains strong compared to mid-2025 levels around $484k.</a:t>
+              <a:t>•  Monthly actuals have fluctuated between $463k and $511k.</a:t>
             </a:r>
           </a:p>
         </p:txBody>
@@ -3790,9 +3790,9 @@
             <a:r>
               <a:rPr sz="1300" b="1">
                 <a:solidFill>
-                  <a:srgbClr val="2E6DB4"/>
-                </a:solidFill>
-                <a:latin typeface="Arial"/>
+                  <a:srgbClr val="0E7C66"/>
+                </a:solidFill>
+                <a:latin typeface="Calibri"/>
               </a:rPr>
               <a:t>DEPARTMENT BREAKDOWN</a:t>
             </a:r>
@@ -3824,11 +3824,11 @@
             <a:r>
               <a:rPr sz="3000" b="1">
                 <a:solidFill>
-                  <a:srgbClr val="1F2A44"/>
-                </a:solidFill>
-                <a:latin typeface="Georgia"/>
+                  <a:srgbClr val="0C2E27"/>
+                </a:solidFill>
+                <a:latin typeface="Cambria"/>
               </a:rPr>
-              <a:t>Operations leads with $101k, but decreased by -$8k from April.</a:t>
+              <a:t>Operations leads with $101k, but decreased by -$8k from last month.</a:t>
             </a:r>
           </a:p>
         </p:txBody>
@@ -3860,7 +3860,7 @@
                 <a:solidFill>
                   <a:srgbClr val="7A828C"/>
                 </a:solidFill>
-                <a:latin typeface="Arial"/>
+                <a:latin typeface="Calibri"/>
               </a:rPr>
               <a:t>Source: dim_department: actual by department (2026-05), verified against the data.</a:t>
             </a:r>
@@ -3918,9 +3918,9 @@
                 <a:solidFill>
                   <a:srgbClr val="7A828C"/>
                 </a:solidFill>
-                <a:latin typeface="Arial"/>
+                <a:latin typeface="Calibri"/>
               </a:rPr>
-              <a:t>In May 2026, Operations holds the highest total at $101k, despite a decline of -$8k compared to April. Sales follows closely with $147k, also experiencing a slight decrease of -$1k. Marketing is the only department that saw an increase, rising by +$2k to reach $75k, indicating a positive trend in that area.</a:t>
+              <a:t>In May 2026, Operations is the leading department with an actual total of $101k, despite experiencing a decline of -$8k compared to April 2026. Sales follows closely with $147k, while Marketing shows a positive trend with an increase of +$2k, reaching $75k. The overall concentration of spending highlights a significant focus on Sales and Operations, which together account for a substantial portion of the total departmental spend.</a:t>
             </a:r>
           </a:p>
         </p:txBody>
@@ -3940,7 +3940,7 @@
             <a:avLst/>
           </a:prstGeom>
           <a:solidFill>
-            <a:srgbClr val="1F2A44"/>
+            <a:srgbClr val="0C2E27"/>
           </a:solidFill>
           <a:ln>
             <a:noFill/>
@@ -3971,7 +3971,7 @@
                 <a:solidFill>
                   <a:srgbClr val="FFFFFF"/>
                 </a:solidFill>
-                <a:latin typeface="Arial"/>
+                <a:latin typeface="Calibri"/>
               </a:rPr>
               <a:t>KEY TAKEAWAY</a:t>
             </a:r>
@@ -4030,9 +4030,9 @@
                 <a:solidFill>
                   <a:srgbClr val="3C4450"/>
                 </a:solidFill>
-                <a:latin typeface="Arial"/>
+                <a:latin typeface="Calibri"/>
               </a:rPr>
-              <a:t>Focus on revitalizing Operations and leveraging Marketing's growth to enhance overall performance.</a:t>
+              <a:t>The decline in Operations spending signals potential operational challenges that need addressing.</a:t>
             </a:r>
           </a:p>
           <a:p>
@@ -4046,9 +4046,9 @@
                 <a:solidFill>
                   <a:srgbClr val="3C4450"/>
                 </a:solidFill>
-                <a:latin typeface="Arial"/>
+                <a:latin typeface="Calibri"/>
               </a:rPr>
-              <a:t>•  Operations decreased by -$8k, leading the department totals at $101k.</a:t>
+              <a:t>•  Sales at $147k remains the highest department spend.</a:t>
             </a:r>
           </a:p>
           <a:p>
@@ -4062,9 +4062,9 @@
                 <a:solidFill>
                   <a:srgbClr val="3C4450"/>
                 </a:solidFill>
-                <a:latin typeface="Arial"/>
+                <a:latin typeface="Calibri"/>
               </a:rPr>
-              <a:t>•  Sales remains significant at $147k, but declined by -$1k.</a:t>
+              <a:t>•  Operations saw the largest decrease of -$8k this month.</a:t>
             </a:r>
           </a:p>
           <a:p>
@@ -4078,9 +4078,9 @@
                 <a:solidFill>
                   <a:srgbClr val="3C4450"/>
                 </a:solidFill>
-                <a:latin typeface="Arial"/>
+                <a:latin typeface="Calibri"/>
               </a:rPr>
-              <a:t>•  Marketing increased by +$2k, showing growth in its budget allocation.</a:t>
+              <a:t>•  Marketing is the only department with a positive change, increasing by +$2k.</a:t>
             </a:r>
           </a:p>
         </p:txBody>
@@ -4128,9 +4128,9 @@
             <a:r>
               <a:rPr sz="1300" b="1">
                 <a:solidFill>
-                  <a:srgbClr val="2E6DB4"/>
-                </a:solidFill>
-                <a:latin typeface="Arial"/>
+                  <a:srgbClr val="0E7C66"/>
+                </a:solidFill>
+                <a:latin typeface="Calibri"/>
               </a:rPr>
               <a:t>RECOMMENDATIONS</a:t>
             </a:r>
@@ -4162,9 +4162,9 @@
             <a:r>
               <a:rPr sz="3000" b="1">
                 <a:solidFill>
-                  <a:srgbClr val="1F2A44"/>
-                </a:solidFill>
-                <a:latin typeface="Georgia"/>
+                  <a:srgbClr val="0C2E27"/>
+                </a:solidFill>
+                <a:latin typeface="Cambria"/>
               </a:rPr>
               <a:t>Priorities for the coming month</a:t>
             </a:r>
@@ -4198,7 +4198,7 @@
                 <a:solidFill>
                   <a:srgbClr val="7A828C"/>
                 </a:solidFill>
-                <a:latin typeface="Arial"/>
+                <a:latin typeface="Calibri"/>
               </a:rPr>
               <a:t>Source: figures verified against the source data.</a:t>
             </a:r>
@@ -4237,9 +4237,9 @@
                 <a:solidFill>
                   <a:srgbClr val="3C4450"/>
                 </a:solidFill>
-                <a:latin typeface="Arial"/>
+                <a:latin typeface="Calibri"/>
               </a:rPr>
-              <a:t>1.   Increase Sales initiatives to capitalize on the $147k contribution, which is 29.3% of total.</a:t>
+              <a:t>1.   Increase Sales initiatives to capitalize on $147k contribution, representing 29.3% of total actual.</a:t>
             </a:r>
           </a:p>
           <a:p>
@@ -4253,9 +4253,9 @@
                 <a:solidFill>
                   <a:srgbClr val="3C4450"/>
                 </a:solidFill>
-                <a:latin typeface="Arial"/>
+                <a:latin typeface="Calibri"/>
               </a:rPr>
-              <a:t>2.   Investigate the $8k decline in Operations to identify root causes and implement corrective actions.</a:t>
+              <a:t>2.   Investigate Operations' decline of -$8k to identify root causes and implement corrective actions.</a:t>
             </a:r>
           </a:p>
           <a:p>
@@ -4269,9 +4269,9 @@
                 <a:solidFill>
                   <a:srgbClr val="3C4450"/>
                 </a:solidFill>
-                <a:latin typeface="Arial"/>
+                <a:latin typeface="Calibri"/>
               </a:rPr>
-              <a:t>3.   Review budget allocations to ensure support for departments experiencing declines, particularly Operations.</a:t>
+              <a:t>3.   Reassess budget allocations to prioritize departments with positive performance trends and mitigate declines.</a:t>
             </a:r>
           </a:p>
           <a:p>
@@ -4285,9 +4285,9 @@
                 <a:solidFill>
                   <a:srgbClr val="3C4450"/>
                 </a:solidFill>
-                <a:latin typeface="Arial"/>
+                <a:latin typeface="Calibri"/>
               </a:rPr>
-              <a:t>4.   Enhance performance tracking to address the overall actual decrease of $10k from the prior month.</a:t>
+              <a:t>4.   Enhance cross-department collaboration to leverage Sales strategies in Operations for improved performance.</a:t>
             </a:r>
           </a:p>
         </p:txBody>

--- a/app/examples/fpa_budget/report.pptx
+++ b/app/examples/fpa_budget/report.pptx
@@ -3094,14 +3094,58 @@
       <p:grpSpPr/>
       <p:sp>
         <p:nvSpPr>
-          <p:cNvPr id="2" name="TextBox 1"/>
+          <p:cNvPr id="2" name="Rectangle 1"/>
+          <p:cNvSpPr/>
+          <p:nvPr/>
+        </p:nvSpPr>
+        <p:spPr>
+          <a:xfrm>
+            <a:off x="0" y="0"/>
+            <a:ext cx="12191695" cy="6858000"/>
+          </a:xfrm>
+          <a:prstGeom prst="rect">
+            <a:avLst/>
+          </a:prstGeom>
+          <a:solidFill>
+            <a:srgbClr val="0C2E27"/>
+          </a:solidFill>
+          <a:ln>
+            <a:noFill/>
+          </a:ln>
+          <a:effectLst/>
+        </p:spPr>
+        <p:style>
+          <a:lnRef idx="1">
+            <a:schemeClr val="accent1"/>
+          </a:lnRef>
+          <a:fillRef idx="3">
+            <a:schemeClr val="accent1"/>
+          </a:fillRef>
+          <a:effectRef idx="2">
+            <a:schemeClr val="accent1"/>
+          </a:effectRef>
+          <a:fontRef idx="minor">
+            <a:schemeClr val="lt1"/>
+          </a:fontRef>
+        </p:style>
+        <p:txBody>
+          <a:bodyPr rtlCol="0" anchor="ctr"/>
+          <a:lstStyle/>
+          <a:p>
+            <a:pPr algn="ctr"/>
+          </a:p>
+        </p:txBody>
+      </p:sp>
+      <p:sp>
+        <p:nvSpPr>
+          <p:cNvPr id="3" name="TextBox 2"/>
           <p:cNvSpPr txBox="1"/>
           <p:nvPr/>
         </p:nvSpPr>
         <p:spPr>
           <a:xfrm>
-            <a:off x="640080" y="2057400"/>
-            <a:ext cx="10881360" cy="1554480"/>
+            <a:off x="777240" y="2148840"/>
+            <a:ext cx="10607040" cy="365760"/>
           </a:xfrm>
           <a:prstGeom prst="rect">
             <a:avLst/>
@@ -3115,27 +3159,71 @@
           <a:lstStyle/>
           <a:p>
             <a:r>
-              <a:rPr sz="4600" b="1">
-                <a:solidFill>
-                  <a:srgbClr val="0C2E27"/>
-                </a:solidFill>
-                <a:latin typeface="Cambria"/>
+              <a:rPr sz="1400" b="1">
+                <a:solidFill>
+                  <a:srgbClr val="0E7C66"/>
+                </a:solidFill>
+                <a:latin typeface="Calibri"/>
               </a:rPr>
-              <a:t>May Financial Performance Analysis</a:t>
-            </a:r>
-          </a:p>
-        </p:txBody>
-      </p:sp>
-      <p:sp>
-        <p:nvSpPr>
-          <p:cNvPr id="3" name="TextBox 2"/>
+              <a:t>PERFORMANCE REVIEW  ·  2026-05</a:t>
+            </a:r>
+          </a:p>
+        </p:txBody>
+      </p:sp>
+      <p:sp>
+        <p:nvSpPr>
+          <p:cNvPr id="4" name="Rectangle 3"/>
+          <p:cNvSpPr/>
+          <p:nvPr/>
+        </p:nvSpPr>
+        <p:spPr>
+          <a:xfrm>
+            <a:off x="822960" y="2697480"/>
+            <a:ext cx="1554480" cy="76200"/>
+          </a:xfrm>
+          <a:prstGeom prst="rect">
+            <a:avLst/>
+          </a:prstGeom>
+          <a:solidFill>
+            <a:srgbClr val="0E7C66"/>
+          </a:solidFill>
+          <a:ln>
+            <a:noFill/>
+          </a:ln>
+          <a:effectLst/>
+        </p:spPr>
+        <p:style>
+          <a:lnRef idx="1">
+            <a:schemeClr val="accent1"/>
+          </a:lnRef>
+          <a:fillRef idx="3">
+            <a:schemeClr val="accent1"/>
+          </a:fillRef>
+          <a:effectRef idx="2">
+            <a:schemeClr val="accent1"/>
+          </a:effectRef>
+          <a:fontRef idx="minor">
+            <a:schemeClr val="lt1"/>
+          </a:fontRef>
+        </p:style>
+        <p:txBody>
+          <a:bodyPr rtlCol="0" anchor="ctr"/>
+          <a:lstStyle/>
+          <a:p>
+            <a:pPr algn="ctr"/>
+          </a:p>
+        </p:txBody>
+      </p:sp>
+      <p:sp>
+        <p:nvSpPr>
+          <p:cNvPr id="5" name="TextBox 4"/>
           <p:cNvSpPr txBox="1"/>
           <p:nvPr/>
         </p:nvSpPr>
         <p:spPr>
           <a:xfrm>
-            <a:off x="640080" y="3703320"/>
-            <a:ext cx="10881360" cy="548640"/>
+            <a:off x="731520" y="2926080"/>
+            <a:ext cx="10698480" cy="1828800"/>
           </a:xfrm>
           <a:prstGeom prst="rect">
             <a:avLst/>
@@ -3149,27 +3237,27 @@
           <a:lstStyle/>
           <a:p>
             <a:r>
-              <a:rPr sz="1700" b="0">
-                <a:solidFill>
-                  <a:srgbClr val="7A828C"/>
-                </a:solidFill>
-                <a:latin typeface="Calibri"/>
+              <a:rPr sz="4600" b="1">
+                <a:solidFill>
+                  <a:srgbClr val="FFFFFF"/>
+                </a:solidFill>
+                <a:latin typeface="Cambria"/>
               </a:rPr>
-              <a:t>Period 2026-05  |  source table: ex_fpa_budget</a:t>
-            </a:r>
-          </a:p>
-        </p:txBody>
-      </p:sp>
-      <p:sp>
-        <p:nvSpPr>
-          <p:cNvPr id="4" name="TextBox 3"/>
+              <a:t>May Financial Performance Analysis</a:t>
+            </a:r>
+          </a:p>
+        </p:txBody>
+      </p:sp>
+      <p:sp>
+        <p:nvSpPr>
+          <p:cNvPr id="6" name="TextBox 5"/>
           <p:cNvSpPr txBox="1"/>
           <p:nvPr/>
         </p:nvSpPr>
         <p:spPr>
           <a:xfrm>
-            <a:off x="640080" y="4206240"/>
-            <a:ext cx="10881360" cy="457200"/>
+            <a:off x="777240" y="5029200"/>
+            <a:ext cx="10698480" cy="548640"/>
           </a:xfrm>
           <a:prstGeom prst="rect">
             <a:avLst/>
@@ -3183,13 +3271,13 @@
           <a:lstStyle/>
           <a:p>
             <a:r>
-              <a:rPr sz="1100" b="0">
-                <a:solidFill>
-                  <a:srgbClr val="7A828C"/>
+              <a:rPr sz="1700" b="0">
+                <a:solidFill>
+                  <a:srgbClr val="C0C5C9"/>
                 </a:solidFill>
                 <a:latin typeface="Calibri"/>
               </a:rPr>
-              <a:t>Generated 2026-06-10 17:37 UTC   |   CONFIDENTIAL</a:t>
+              <a:t>Finance / FP&amp;A dataset  ·  144 rows</a:t>
             </a:r>
           </a:p>
         </p:txBody>
@@ -3883,8 +3971,8 @@
         </p:blipFill>
         <p:spPr>
           <a:xfrm>
-            <a:off x="457200" y="1783080"/>
-            <a:ext cx="6949440" cy="3563815"/>
+            <a:off x="3264408" y="1645920"/>
+            <a:ext cx="5669280" cy="2907323"/>
           </a:xfrm>
           <a:prstGeom prst="rect">
             <a:avLst/>
@@ -3899,8 +3987,8 @@
         </p:nvSpPr>
         <p:spPr>
           <a:xfrm>
-            <a:off x="457200" y="5486400"/>
-            <a:ext cx="6949440" cy="868680"/>
+            <a:off x="457200" y="4572000"/>
+            <a:ext cx="11277295" cy="411480"/>
           </a:xfrm>
           <a:prstGeom prst="rect">
             <a:avLst/>
@@ -3913,14 +4001,15 @@
           </a:bodyPr>
           <a:lstStyle/>
           <a:p>
-            <a:r>
-              <a:rPr sz="1100" b="0">
-                <a:solidFill>
-                  <a:srgbClr val="7A828C"/>
+            <a:pPr algn="ctr"/>
+            <a:r>
+              <a:rPr sz="1300" b="1">
+                <a:solidFill>
+                  <a:srgbClr val="0C2E27"/>
                 </a:solidFill>
                 <a:latin typeface="Calibri"/>
               </a:rPr>
-              <a:t>In May 2026, Operations is the leading department with an actual total of $101k, despite experiencing a decline of -$8k compared to April 2026. Sales follows closely with $147k, while Marketing shows a positive trend with an increase of +$2k, reaching $75k. The overall concentration of spending highlights a significant focus on Sales and Operations, which together account for a substantial portion of the total departmental spend.</a:t>
+              <a:t>The decline in Operations spending signals potential operational challenges that need addressing.</a:t>
             </a:r>
           </a:p>
         </p:txBody>
@@ -3933,14 +4022,14 @@
         </p:nvSpPr>
         <p:spPr>
           <a:xfrm>
-            <a:off x="7772400" y="1783080"/>
-            <a:ext cx="3931920" cy="457200"/>
+            <a:off x="457200" y="5074920"/>
+            <a:ext cx="3454298" cy="50800"/>
           </a:xfrm>
           <a:prstGeom prst="rect">
             <a:avLst/>
           </a:prstGeom>
           <a:solidFill>
-            <a:srgbClr val="0C2E27"/>
+            <a:srgbClr val="0E7C66"/>
           </a:solidFill>
           <a:ln>
             <a:noFill/>
@@ -3962,43 +4051,100 @@
           </a:fontRef>
         </p:style>
         <p:txBody>
-          <a:bodyPr rtlCol="0" anchor="ctr" lIns="201168" tIns="18288" bIns="18288"/>
+          <a:bodyPr rtlCol="0" anchor="ctr"/>
           <a:lstStyle/>
           <a:p>
             <a:pPr algn="ctr"/>
-            <a:r>
-              <a:rPr sz="1200" b="1">
-                <a:solidFill>
-                  <a:srgbClr val="FFFFFF"/>
+          </a:p>
+        </p:txBody>
+      </p:sp>
+      <p:sp>
+        <p:nvSpPr>
+          <p:cNvPr id="8" name="TextBox 7"/>
+          <p:cNvSpPr txBox="1"/>
+          <p:nvPr/>
+        </p:nvSpPr>
+        <p:spPr>
+          <a:xfrm>
+            <a:off x="457200" y="5184648"/>
+            <a:ext cx="3454298" cy="777240"/>
+          </a:xfrm>
+          <a:prstGeom prst="rect">
+            <a:avLst/>
+          </a:prstGeom>
+          <a:noFill/>
+        </p:spPr>
+        <p:txBody>
+          <a:bodyPr wrap="square">
+            <a:spAutoFit/>
+          </a:bodyPr>
+          <a:lstStyle/>
+          <a:p>
+            <a:r>
+              <a:rPr sz="3000" b="1">
+                <a:solidFill>
+                  <a:srgbClr val="0C2E27"/>
+                </a:solidFill>
+                <a:latin typeface="Cambria"/>
+              </a:rPr>
+              <a:t>$147k</a:t>
+            </a:r>
+          </a:p>
+        </p:txBody>
+      </p:sp>
+      <p:sp>
+        <p:nvSpPr>
+          <p:cNvPr id="9" name="TextBox 8"/>
+          <p:cNvSpPr txBox="1"/>
+          <p:nvPr/>
+        </p:nvSpPr>
+        <p:spPr>
+          <a:xfrm>
+            <a:off x="457200" y="5943600"/>
+            <a:ext cx="3454298" cy="502920"/>
+          </a:xfrm>
+          <a:prstGeom prst="rect">
+            <a:avLst/>
+          </a:prstGeom>
+          <a:noFill/>
+        </p:spPr>
+        <p:txBody>
+          <a:bodyPr wrap="square">
+            <a:spAutoFit/>
+          </a:bodyPr>
+          <a:lstStyle/>
+          <a:p>
+            <a:r>
+              <a:rPr sz="1200" b="0">
+                <a:solidFill>
+                  <a:srgbClr val="7A828C"/>
                 </a:solidFill>
                 <a:latin typeface="Calibri"/>
               </a:rPr>
-              <a:t>KEY TAKEAWAY</a:t>
-            </a:r>
-          </a:p>
-        </p:txBody>
-      </p:sp>
-      <p:sp>
-        <p:nvSpPr>
-          <p:cNvPr id="8" name="Rectangle 7"/>
+              <a:t>Sales</a:t>
+            </a:r>
+          </a:p>
+        </p:txBody>
+      </p:sp>
+      <p:sp>
+        <p:nvSpPr>
+          <p:cNvPr id="10" name="Rectangle 9"/>
           <p:cNvSpPr/>
           <p:nvPr/>
         </p:nvSpPr>
         <p:spPr>
           <a:xfrm>
-            <a:off x="7772400" y="2240280"/>
-            <a:ext cx="3931920" cy="3200400"/>
+            <a:off x="4368698" y="5074920"/>
+            <a:ext cx="3454298" cy="50800"/>
           </a:xfrm>
           <a:prstGeom prst="rect">
             <a:avLst/>
           </a:prstGeom>
           <a:solidFill>
-            <a:srgbClr val="E6E8EB"/>
+            <a:srgbClr val="0E7C66"/>
           </a:solidFill>
-          <a:ln w="9525">
-            <a:solidFill>
-              <a:srgbClr val="C0C5C9"/>
-            </a:solidFill>
+          <a:ln>
+            <a:noFill/>
           </a:ln>
           <a:effectLst/>
         </p:spPr>
@@ -4017,70 +4163,189 @@
           </a:fontRef>
         </p:style>
         <p:txBody>
-          <a:bodyPr rtlCol="0" anchor="t" wrap="square" lIns="219456" rIns="219456" tIns="237744"/>
-          <a:lstStyle/>
-          <a:p>
-            <a:pPr algn="l">
-              <a:spcAft>
-                <a:spcPts val="1600"/>
-              </a:spcAft>
-            </a:pPr>
-            <a:r>
-              <a:rPr sz="1300" b="0">
-                <a:solidFill>
-                  <a:srgbClr val="3C4450"/>
+          <a:bodyPr rtlCol="0" anchor="ctr"/>
+          <a:lstStyle/>
+          <a:p>
+            <a:pPr algn="ctr"/>
+          </a:p>
+        </p:txBody>
+      </p:sp>
+      <p:sp>
+        <p:nvSpPr>
+          <p:cNvPr id="11" name="TextBox 10"/>
+          <p:cNvSpPr txBox="1"/>
+          <p:nvPr/>
+        </p:nvSpPr>
+        <p:spPr>
+          <a:xfrm>
+            <a:off x="4368698" y="5184648"/>
+            <a:ext cx="3454298" cy="777240"/>
+          </a:xfrm>
+          <a:prstGeom prst="rect">
+            <a:avLst/>
+          </a:prstGeom>
+          <a:noFill/>
+        </p:spPr>
+        <p:txBody>
+          <a:bodyPr wrap="square">
+            <a:spAutoFit/>
+          </a:bodyPr>
+          <a:lstStyle/>
+          <a:p>
+            <a:r>
+              <a:rPr sz="3000" b="1">
+                <a:solidFill>
+                  <a:srgbClr val="0C2E27"/>
+                </a:solidFill>
+                <a:latin typeface="Cambria"/>
+              </a:rPr>
+              <a:t>$101k</a:t>
+            </a:r>
+          </a:p>
+        </p:txBody>
+      </p:sp>
+      <p:sp>
+        <p:nvSpPr>
+          <p:cNvPr id="12" name="TextBox 11"/>
+          <p:cNvSpPr txBox="1"/>
+          <p:nvPr/>
+        </p:nvSpPr>
+        <p:spPr>
+          <a:xfrm>
+            <a:off x="4368698" y="5943600"/>
+            <a:ext cx="3454298" cy="502920"/>
+          </a:xfrm>
+          <a:prstGeom prst="rect">
+            <a:avLst/>
+          </a:prstGeom>
+          <a:noFill/>
+        </p:spPr>
+        <p:txBody>
+          <a:bodyPr wrap="square">
+            <a:spAutoFit/>
+          </a:bodyPr>
+          <a:lstStyle/>
+          <a:p>
+            <a:r>
+              <a:rPr sz="1200" b="0">
+                <a:solidFill>
+                  <a:srgbClr val="7A828C"/>
                 </a:solidFill>
                 <a:latin typeface="Calibri"/>
               </a:rPr>
-              <a:t>The decline in Operations spending signals potential operational challenges that need addressing.</a:t>
-            </a:r>
-          </a:p>
-          <a:p>
-            <a:pPr algn="l">
-              <a:spcAft>
-                <a:spcPts val="700"/>
-              </a:spcAft>
-            </a:pPr>
-            <a:r>
-              <a:rPr sz="1100" b="0">
-                <a:solidFill>
-                  <a:srgbClr val="3C4450"/>
+              <a:t>Operations</a:t>
+            </a:r>
+          </a:p>
+        </p:txBody>
+      </p:sp>
+      <p:sp>
+        <p:nvSpPr>
+          <p:cNvPr id="13" name="Rectangle 12"/>
+          <p:cNvSpPr/>
+          <p:nvPr/>
+        </p:nvSpPr>
+        <p:spPr>
+          <a:xfrm>
+            <a:off x="8280196" y="5074920"/>
+            <a:ext cx="3454298" cy="50800"/>
+          </a:xfrm>
+          <a:prstGeom prst="rect">
+            <a:avLst/>
+          </a:prstGeom>
+          <a:solidFill>
+            <a:srgbClr val="0E7C66"/>
+          </a:solidFill>
+          <a:ln>
+            <a:noFill/>
+          </a:ln>
+          <a:effectLst/>
+        </p:spPr>
+        <p:style>
+          <a:lnRef idx="1">
+            <a:schemeClr val="accent1"/>
+          </a:lnRef>
+          <a:fillRef idx="3">
+            <a:schemeClr val="accent1"/>
+          </a:fillRef>
+          <a:effectRef idx="2">
+            <a:schemeClr val="accent1"/>
+          </a:effectRef>
+          <a:fontRef idx="minor">
+            <a:schemeClr val="lt1"/>
+          </a:fontRef>
+        </p:style>
+        <p:txBody>
+          <a:bodyPr rtlCol="0" anchor="ctr"/>
+          <a:lstStyle/>
+          <a:p>
+            <a:pPr algn="ctr"/>
+          </a:p>
+        </p:txBody>
+      </p:sp>
+      <p:sp>
+        <p:nvSpPr>
+          <p:cNvPr id="14" name="TextBox 13"/>
+          <p:cNvSpPr txBox="1"/>
+          <p:nvPr/>
+        </p:nvSpPr>
+        <p:spPr>
+          <a:xfrm>
+            <a:off x="8280196" y="5184648"/>
+            <a:ext cx="3454298" cy="777240"/>
+          </a:xfrm>
+          <a:prstGeom prst="rect">
+            <a:avLst/>
+          </a:prstGeom>
+          <a:noFill/>
+        </p:spPr>
+        <p:txBody>
+          <a:bodyPr wrap="square">
+            <a:spAutoFit/>
+          </a:bodyPr>
+          <a:lstStyle/>
+          <a:p>
+            <a:r>
+              <a:rPr sz="3000" b="1">
+                <a:solidFill>
+                  <a:srgbClr val="0C2E27"/>
+                </a:solidFill>
+                <a:latin typeface="Cambria"/>
+              </a:rPr>
+              <a:t>$79k</a:t>
+            </a:r>
+          </a:p>
+        </p:txBody>
+      </p:sp>
+      <p:sp>
+        <p:nvSpPr>
+          <p:cNvPr id="15" name="TextBox 14"/>
+          <p:cNvSpPr txBox="1"/>
+          <p:nvPr/>
+        </p:nvSpPr>
+        <p:spPr>
+          <a:xfrm>
+            <a:off x="8280196" y="5943600"/>
+            <a:ext cx="3454298" cy="502920"/>
+          </a:xfrm>
+          <a:prstGeom prst="rect">
+            <a:avLst/>
+          </a:prstGeom>
+          <a:noFill/>
+        </p:spPr>
+        <p:txBody>
+          <a:bodyPr wrap="square">
+            <a:spAutoFit/>
+          </a:bodyPr>
+          <a:lstStyle/>
+          <a:p>
+            <a:r>
+              <a:rPr sz="1200" b="0">
+                <a:solidFill>
+                  <a:srgbClr val="7A828C"/>
                 </a:solidFill>
                 <a:latin typeface="Calibri"/>
               </a:rPr>
-              <a:t>•  Sales at $147k remains the highest department spend.</a:t>
-            </a:r>
-          </a:p>
-          <a:p>
-            <a:pPr algn="l">
-              <a:spcAft>
-                <a:spcPts val="700"/>
-              </a:spcAft>
-            </a:pPr>
-            <a:r>
-              <a:rPr sz="1100" b="0">
-                <a:solidFill>
-                  <a:srgbClr val="3C4450"/>
-                </a:solidFill>
-                <a:latin typeface="Calibri"/>
-              </a:rPr>
-              <a:t>•  Operations saw the largest decrease of -$8k this month.</a:t>
-            </a:r>
-          </a:p>
-          <a:p>
-            <a:pPr algn="l">
-              <a:spcAft>
-                <a:spcPts val="700"/>
-              </a:spcAft>
-            </a:pPr>
-            <a:r>
-              <a:rPr sz="1100" b="0">
-                <a:solidFill>
-                  <a:srgbClr val="3C4450"/>
-                </a:solidFill>
-                <a:latin typeface="Calibri"/>
-              </a:rPr>
-              <a:t>•  Marketing is the only department with a positive change, increasing by +$2k.</a:t>
+              <a:t>R&amp;D</a:t>
             </a:r>
           </a:p>
         </p:txBody>

--- a/app/examples/fpa_budget/report.pptx
+++ b/app/examples/fpa_budget/report.pptx
@@ -10,6 +10,7 @@
     <p:sldId id="258" r:id="rId9"/>
     <p:sldId id="259" r:id="rId10"/>
     <p:sldId id="260" r:id="rId11"/>
+    <p:sldId id="261" r:id="rId12"/>
   </p:sldIdLst>
   <p:sldSz cx="12191695" cy="6858000" type="screen4x3"/>
   <p:notesSz cx="6858000" cy="9144000"/>
@@ -3094,20 +3095,54 @@
       <p:grpSpPr/>
       <p:sp>
         <p:nvSpPr>
-          <p:cNvPr id="2" name="Rectangle 1"/>
+          <p:cNvPr id="2" name="TextBox 1"/>
+          <p:cNvSpPr txBox="1"/>
+          <p:nvPr/>
+        </p:nvSpPr>
+        <p:spPr>
+          <a:xfrm>
+            <a:off x="777240" y="777240"/>
+            <a:ext cx="10607040" cy="1828800"/>
+          </a:xfrm>
+          <a:prstGeom prst="rect">
+            <a:avLst/>
+          </a:prstGeom>
+          <a:noFill/>
+        </p:spPr>
+        <p:txBody>
+          <a:bodyPr wrap="square">
+            <a:spAutoFit/>
+          </a:bodyPr>
+          <a:lstStyle/>
+          <a:p>
+            <a:r>
+              <a:rPr sz="4600" b="1">
+                <a:solidFill>
+                  <a:srgbClr val="0C2E27"/>
+                </a:solidFill>
+                <a:latin typeface="Cambria"/>
+              </a:rPr>
+              <a:t>May Financial Performance Analysis</a:t>
+            </a:r>
+          </a:p>
+        </p:txBody>
+      </p:sp>
+      <p:sp>
+        <p:nvSpPr>
+          <p:cNvPr id="3" name="Rectangle 2"/>
           <p:cNvSpPr/>
           <p:nvPr/>
         </p:nvSpPr>
         <p:spPr>
           <a:xfrm>
-            <a:off x="0" y="0"/>
-            <a:ext cx="12191695" cy="6858000"/>
+            <a:off x="822960" y="2743200"/>
+            <a:ext cx="1554480" cy="76200"/>
           </a:xfrm>
           <a:prstGeom prst="rect">
             <a:avLst/>
           </a:prstGeom>
           <a:solidFill>
-            <a:srgbClr val="0C2E27"/>
+            <a:srgbClr val="0E7C66"/>
           </a:solidFill>
           <a:ln>
             <a:noFill/>
@@ -3138,14 +3173,14 @@
       </p:sp>
       <p:sp>
         <p:nvSpPr>
-          <p:cNvPr id="3" name="TextBox 2"/>
+          <p:cNvPr id="4" name="TextBox 3"/>
           <p:cNvSpPr txBox="1"/>
           <p:nvPr/>
         </p:nvSpPr>
         <p:spPr>
           <a:xfrm>
-            <a:off x="777240" y="2148840"/>
-            <a:ext cx="10607040" cy="365760"/>
+            <a:off x="777240" y="2971800"/>
+            <a:ext cx="10607040" cy="548640"/>
           </a:xfrm>
           <a:prstGeom prst="rect">
             <a:avLst/>
@@ -3159,125 +3194,13 @@
           <a:lstStyle/>
           <a:p>
             <a:r>
-              <a:rPr sz="1400" b="1">
-                <a:solidFill>
-                  <a:srgbClr val="0E7C66"/>
+              <a:rPr sz="1700" b="0">
+                <a:solidFill>
+                  <a:srgbClr val="7A828C"/>
                 </a:solidFill>
                 <a:latin typeface="Calibri"/>
               </a:rPr>
-              <a:t>PERFORMANCE REVIEW  ·  2026-05</a:t>
-            </a:r>
-          </a:p>
-        </p:txBody>
-      </p:sp>
-      <p:sp>
-        <p:nvSpPr>
-          <p:cNvPr id="4" name="Rectangle 3"/>
-          <p:cNvSpPr/>
-          <p:nvPr/>
-        </p:nvSpPr>
-        <p:spPr>
-          <a:xfrm>
-            <a:off x="822960" y="2697480"/>
-            <a:ext cx="1554480" cy="76200"/>
-          </a:xfrm>
-          <a:prstGeom prst="rect">
-            <a:avLst/>
-          </a:prstGeom>
-          <a:solidFill>
-            <a:srgbClr val="0E7C66"/>
-          </a:solidFill>
-          <a:ln>
-            <a:noFill/>
-          </a:ln>
-          <a:effectLst/>
-        </p:spPr>
-        <p:style>
-          <a:lnRef idx="1">
-            <a:schemeClr val="accent1"/>
-          </a:lnRef>
-          <a:fillRef idx="3">
-            <a:schemeClr val="accent1"/>
-          </a:fillRef>
-          <a:effectRef idx="2">
-            <a:schemeClr val="accent1"/>
-          </a:effectRef>
-          <a:fontRef idx="minor">
-            <a:schemeClr val="lt1"/>
-          </a:fontRef>
-        </p:style>
-        <p:txBody>
-          <a:bodyPr rtlCol="0" anchor="ctr"/>
-          <a:lstStyle/>
-          <a:p>
-            <a:pPr algn="ctr"/>
-          </a:p>
-        </p:txBody>
-      </p:sp>
-      <p:sp>
-        <p:nvSpPr>
-          <p:cNvPr id="5" name="TextBox 4"/>
-          <p:cNvSpPr txBox="1"/>
-          <p:nvPr/>
-        </p:nvSpPr>
-        <p:spPr>
-          <a:xfrm>
-            <a:off x="731520" y="2926080"/>
-            <a:ext cx="10698480" cy="1828800"/>
-          </a:xfrm>
-          <a:prstGeom prst="rect">
-            <a:avLst/>
-          </a:prstGeom>
-          <a:noFill/>
-        </p:spPr>
-        <p:txBody>
-          <a:bodyPr wrap="square">
-            <a:spAutoFit/>
-          </a:bodyPr>
-          <a:lstStyle/>
-          <a:p>
-            <a:r>
-              <a:rPr sz="4600" b="1">
-                <a:solidFill>
-                  <a:srgbClr val="FFFFFF"/>
-                </a:solidFill>
-                <a:latin typeface="Cambria"/>
-              </a:rPr>
-              <a:t>May Financial Performance Analysis</a:t>
-            </a:r>
-          </a:p>
-        </p:txBody>
-      </p:sp>
-      <p:sp>
-        <p:nvSpPr>
-          <p:cNvPr id="6" name="TextBox 5"/>
-          <p:cNvSpPr txBox="1"/>
-          <p:nvPr/>
-        </p:nvSpPr>
-        <p:spPr>
-          <a:xfrm>
-            <a:off x="777240" y="5029200"/>
-            <a:ext cx="10698480" cy="548640"/>
-          </a:xfrm>
-          <a:prstGeom prst="rect">
-            <a:avLst/>
-          </a:prstGeom>
-          <a:noFill/>
-        </p:spPr>
-        <p:txBody>
-          <a:bodyPr wrap="square">
-            <a:spAutoFit/>
-          </a:bodyPr>
-          <a:lstStyle/>
-          <a:p>
-            <a:r>
-              <a:rPr sz="1700" b="0">
-                <a:solidFill>
-                  <a:srgbClr val="C0C5C9"/>
-                </a:solidFill>
-                <a:latin typeface="Calibri"/>
-              </a:rPr>
-              <a:t>Finance / FP&amp;A dataset  ·  144 rows</a:t>
+              <a:t>Finance / FP&amp;A dataset  ·  1,152 rows</a:t>
             </a:r>
           </a:p>
         </p:txBody>
@@ -3363,7 +3286,7 @@
                 </a:solidFill>
                 <a:latin typeface="Cambria"/>
               </a:rPr>
-              <a:t>Sales remains a strong contributor despite overall decline.</a:t>
+              <a:t>Stable total actual indicates consistent financial health despite minor declines.</a:t>
             </a:r>
           </a:p>
         </p:txBody>
@@ -3444,7 +3367,7 @@
                 </a:solidFill>
                 <a:latin typeface="Calibri"/>
               </a:rPr>
-              <a:t>Total actual is $501k in 2026-05, reflecting a decline of -1.9%.</a:t>
+              <a:t>Total actual remains steady at $517k, reflecting stability.</a:t>
             </a:r>
           </a:p>
           <a:p>
@@ -3468,7 +3391,7 @@
                 </a:solidFill>
                 <a:latin typeface="Calibri"/>
               </a:rPr>
-              <a:t>Sales leads with $147k, representing 29.3% of total actual.</a:t>
+              <a:t>Sales leads departments at $149k, contributing 28.8% of total actual.</a:t>
             </a:r>
           </a:p>
           <a:p>
@@ -3492,7 +3415,55 @@
                 </a:solidFill>
                 <a:latin typeface="Calibri"/>
               </a:rPr>
-              <a:t>Operations experienced the largest decline at -$8k compared to prior month.</a:t>
+              <a:t>Sales experienced a decline of -$5k compared to the prior month.</a:t>
+            </a:r>
+          </a:p>
+          <a:p>
+            <a:pPr>
+              <a:spcAft>
+                <a:spcPts val="1600"/>
+              </a:spcAft>
+            </a:pPr>
+            <a:r>
+              <a:rPr sz="1600" b="1">
+                <a:solidFill>
+                  <a:srgbClr val="0E7C66"/>
+                </a:solidFill>
+              </a:rPr>
+              <a:t>●  </a:t>
+            </a:r>
+            <a:r>
+              <a:rPr sz="1600" b="0">
+                <a:solidFill>
+                  <a:srgbClr val="3C4450"/>
+                </a:solidFill>
+                <a:latin typeface="Calibri"/>
+              </a:rPr>
+              <a:t>Salaries &amp; Wages dominate at $231k, making up 44.8% of total actual.</a:t>
+            </a:r>
+          </a:p>
+          <a:p>
+            <a:pPr>
+              <a:spcAft>
+                <a:spcPts val="1600"/>
+              </a:spcAft>
+            </a:pPr>
+            <a:r>
+              <a:rPr sz="1600" b="1">
+                <a:solidFill>
+                  <a:srgbClr val="0E7C66"/>
+                </a:solidFill>
+              </a:rPr>
+              <a:t>●  </a:t>
+            </a:r>
+            <a:r>
+              <a:rPr sz="1600" b="0">
+                <a:solidFill>
+                  <a:srgbClr val="3C4450"/>
+                </a:solidFill>
+                <a:latin typeface="Calibri"/>
+              </a:rPr>
+              <a:t>Salaries &amp; Wages decreased by -$2k from the previous month.</a:t>
             </a:r>
           </a:p>
         </p:txBody>
@@ -3578,7 +3549,7 @@
                 </a:solidFill>
                 <a:latin typeface="Cambria"/>
               </a:rPr>
-              <a:t>Actual decreased to $501k in May, down $10k from April's peak of $511k.</a:t>
+              <a:t>Actual remained stable at $517k in 2026-05, matching April's performance.</a:t>
             </a:r>
           </a:p>
         </p:txBody>
@@ -3670,7 +3641,7 @@
                 </a:solidFill>
                 <a:latin typeface="Calibri"/>
               </a:rPr>
-              <a:t>In May 2026, actual totaled $501k, reflecting a decrease of $10k or -1.9% compared to April's peak of $511k. This decline marks a slight dip following a strong performance in April, which was the highest month recorded in the past year. The trend over the last 12 months shows fluctuations, with the highest monthly actual consistently around $511k.</a:t>
+              <a:t>In May 2026, actual totaled $517k, consistent with April's figure of $517k, reflecting a slight decrease of -0.1%. The recent trend shows a peak month of $530k in February 2026, followed by a gradual decline to the current level. This stability indicates a potential seasonal pattern as we approach the mid-year mark.</a:t>
             </a:r>
           </a:p>
         </p:txBody>
@@ -3782,7 +3753,7 @@
                 </a:solidFill>
                 <a:latin typeface="Calibri"/>
               </a:rPr>
-              <a:t>Maintaining focus on sustaining performance is crucial as we navigate post-peak adjustments.</a:t>
+              <a:t>Maintaining $517k suggests resilience in performance despite recent fluctuations.</a:t>
             </a:r>
           </a:p>
           <a:p>
@@ -3798,7 +3769,7 @@
                 </a:solidFill>
                 <a:latin typeface="Calibri"/>
               </a:rPr>
-              <a:t>•  May's actual of $501k is below April's peak of $511k.</a:t>
+              <a:t>•  Actual in May 2026 is $517k, unchanged from April 2026.</a:t>
             </a:r>
           </a:p>
           <a:p>
@@ -3814,7 +3785,7 @@
                 </a:solidFill>
                 <a:latin typeface="Calibri"/>
               </a:rPr>
-              <a:t>•  The last 12 months show a peak in April 2026.</a:t>
+              <a:t>•  The peak month was $530k in February 2026.</a:t>
             </a:r>
           </a:p>
           <a:p>
@@ -3830,7 +3801,7 @@
                 </a:solidFill>
                 <a:latin typeface="Calibri"/>
               </a:rPr>
-              <a:t>•  Monthly actuals have fluctuated between $463k and $511k.</a:t>
+              <a:t>•  Monthly actuals show fluctuations but overall stability in recent months.</a:t>
             </a:r>
           </a:p>
         </p:txBody>
@@ -3916,7 +3887,7 @@
                 </a:solidFill>
                 <a:latin typeface="Cambria"/>
               </a:rPr>
-              <a:t>Operations leads with $101k, but decreased by -$8k from last month.</a:t>
+              <a:t>Sales leads with $149k, while Customer Success grows by $3k versus last period.</a:t>
             </a:r>
           </a:p>
         </p:txBody>
@@ -3971,8 +3942,8 @@
         </p:blipFill>
         <p:spPr>
           <a:xfrm>
-            <a:off x="3264408" y="1645920"/>
-            <a:ext cx="5669280" cy="2907323"/>
+            <a:off x="914400" y="1554480"/>
+            <a:ext cx="10332720" cy="3061547"/>
           </a:xfrm>
           <a:prstGeom prst="rect">
             <a:avLst/>
@@ -3981,48 +3952,13 @@
       </p:pic>
       <p:sp>
         <p:nvSpPr>
-          <p:cNvPr id="6" name="TextBox 5"/>
-          <p:cNvSpPr txBox="1"/>
-          <p:nvPr/>
-        </p:nvSpPr>
-        <p:spPr>
-          <a:xfrm>
-            <a:off x="457200" y="4572000"/>
-            <a:ext cx="11277295" cy="411480"/>
-          </a:xfrm>
-          <a:prstGeom prst="rect">
-            <a:avLst/>
-          </a:prstGeom>
-          <a:noFill/>
-        </p:spPr>
-        <p:txBody>
-          <a:bodyPr wrap="square">
-            <a:spAutoFit/>
-          </a:bodyPr>
-          <a:lstStyle/>
-          <a:p>
-            <a:pPr algn="ctr"/>
-            <a:r>
-              <a:rPr sz="1300" b="1">
-                <a:solidFill>
-                  <a:srgbClr val="0C2E27"/>
-                </a:solidFill>
-                <a:latin typeface="Calibri"/>
-              </a:rPr>
-              <a:t>The decline in Operations spending signals potential operational challenges that need addressing.</a:t>
-            </a:r>
-          </a:p>
-        </p:txBody>
-      </p:sp>
-      <p:sp>
-        <p:nvSpPr>
-          <p:cNvPr id="7" name="Rectangle 6"/>
+          <p:cNvPr id="6" name="Rectangle 5"/>
           <p:cNvSpPr/>
           <p:nvPr/>
         </p:nvSpPr>
         <p:spPr>
           <a:xfrm>
-            <a:off x="457200" y="5074920"/>
+            <a:off x="457200" y="4754880"/>
             <a:ext cx="3454298" cy="50800"/>
           </a:xfrm>
           <a:prstGeom prst="rect">
@@ -4060,14 +3996,14 @@
       </p:sp>
       <p:sp>
         <p:nvSpPr>
-          <p:cNvPr id="8" name="TextBox 7"/>
+          <p:cNvPr id="7" name="TextBox 6"/>
           <p:cNvSpPr txBox="1"/>
           <p:nvPr/>
         </p:nvSpPr>
         <p:spPr>
           <a:xfrm>
-            <a:off x="457200" y="5184648"/>
-            <a:ext cx="3454298" cy="777240"/>
+            <a:off x="457200" y="4846320"/>
+            <a:ext cx="3454298" cy="640080"/>
           </a:xfrm>
           <a:prstGeom prst="rect">
             <a:avLst/>
@@ -4081,27 +4017,27 @@
           <a:lstStyle/>
           <a:p>
             <a:r>
-              <a:rPr sz="3000" b="1">
+              <a:rPr sz="2700" b="1">
                 <a:solidFill>
                   <a:srgbClr val="0C2E27"/>
                 </a:solidFill>
                 <a:latin typeface="Cambria"/>
               </a:rPr>
-              <a:t>$147k</a:t>
-            </a:r>
-          </a:p>
-        </p:txBody>
-      </p:sp>
-      <p:sp>
-        <p:nvSpPr>
-          <p:cNvPr id="9" name="TextBox 8"/>
+              <a:t>$149k</a:t>
+            </a:r>
+          </a:p>
+        </p:txBody>
+      </p:sp>
+      <p:sp>
+        <p:nvSpPr>
+          <p:cNvPr id="8" name="TextBox 7"/>
           <p:cNvSpPr txBox="1"/>
           <p:nvPr/>
         </p:nvSpPr>
         <p:spPr>
           <a:xfrm>
-            <a:off x="457200" y="5943600"/>
-            <a:ext cx="3454298" cy="502920"/>
+            <a:off x="457200" y="5468112"/>
+            <a:ext cx="3454298" cy="1417320"/>
           </a:xfrm>
           <a:prstGeom prst="rect">
             <a:avLst/>
@@ -4115,26 +4051,26 @@
           <a:lstStyle/>
           <a:p>
             <a:r>
-              <a:rPr sz="1200" b="0">
+              <a:rPr sz="1100" b="0">
                 <a:solidFill>
                   <a:srgbClr val="7A828C"/>
                 </a:solidFill>
                 <a:latin typeface="Calibri"/>
               </a:rPr>
-              <a:t>Sales</a:t>
-            </a:r>
-          </a:p>
-        </p:txBody>
-      </p:sp>
-      <p:sp>
-        <p:nvSpPr>
-          <p:cNvPr id="10" name="Rectangle 9"/>
+              <a:t>Sales: $149k, 28.8% of total spend</a:t>
+            </a:r>
+          </a:p>
+        </p:txBody>
+      </p:sp>
+      <p:sp>
+        <p:nvSpPr>
+          <p:cNvPr id="9" name="Rectangle 8"/>
           <p:cNvSpPr/>
           <p:nvPr/>
         </p:nvSpPr>
         <p:spPr>
           <a:xfrm>
-            <a:off x="4368698" y="5074920"/>
+            <a:off x="4368698" y="4754880"/>
             <a:ext cx="3454298" cy="50800"/>
           </a:xfrm>
           <a:prstGeom prst="rect">
@@ -4172,14 +4108,14 @@
       </p:sp>
       <p:sp>
         <p:nvSpPr>
-          <p:cNvPr id="11" name="TextBox 10"/>
+          <p:cNvPr id="10" name="TextBox 9"/>
           <p:cNvSpPr txBox="1"/>
           <p:nvPr/>
         </p:nvSpPr>
         <p:spPr>
           <a:xfrm>
-            <a:off x="4368698" y="5184648"/>
-            <a:ext cx="3454298" cy="777240"/>
+            <a:off x="4368698" y="4846320"/>
+            <a:ext cx="3454298" cy="640080"/>
           </a:xfrm>
           <a:prstGeom prst="rect">
             <a:avLst/>
@@ -4193,27 +4129,27 @@
           <a:lstStyle/>
           <a:p>
             <a:r>
-              <a:rPr sz="3000" b="1">
+              <a:rPr sz="2700" b="1">
                 <a:solidFill>
                   <a:srgbClr val="0C2E27"/>
                 </a:solidFill>
                 <a:latin typeface="Cambria"/>
               </a:rPr>
-              <a:t>$101k</a:t>
-            </a:r>
-          </a:p>
-        </p:txBody>
-      </p:sp>
-      <p:sp>
-        <p:nvSpPr>
-          <p:cNvPr id="12" name="TextBox 11"/>
+              <a:t>$103k</a:t>
+            </a:r>
+          </a:p>
+        </p:txBody>
+      </p:sp>
+      <p:sp>
+        <p:nvSpPr>
+          <p:cNvPr id="11" name="TextBox 10"/>
           <p:cNvSpPr txBox="1"/>
           <p:nvPr/>
         </p:nvSpPr>
         <p:spPr>
           <a:xfrm>
-            <a:off x="4368698" y="5943600"/>
-            <a:ext cx="3454298" cy="502920"/>
+            <a:off x="4368698" y="5468112"/>
+            <a:ext cx="3454298" cy="1417320"/>
           </a:xfrm>
           <a:prstGeom prst="rect">
             <a:avLst/>
@@ -4227,26 +4163,26 @@
           <a:lstStyle/>
           <a:p>
             <a:r>
-              <a:rPr sz="1200" b="0">
+              <a:rPr sz="1100" b="0">
                 <a:solidFill>
                   <a:srgbClr val="7A828C"/>
                 </a:solidFill>
                 <a:latin typeface="Calibri"/>
               </a:rPr>
-              <a:t>Operations</a:t>
-            </a:r>
-          </a:p>
-        </p:txBody>
-      </p:sp>
-      <p:sp>
-        <p:nvSpPr>
-          <p:cNvPr id="13" name="Rectangle 12"/>
+              <a:t>Customer Success: +$3k growth</a:t>
+            </a:r>
+          </a:p>
+        </p:txBody>
+      </p:sp>
+      <p:sp>
+        <p:nvSpPr>
+          <p:cNvPr id="12" name="Rectangle 11"/>
           <p:cNvSpPr/>
           <p:nvPr/>
         </p:nvSpPr>
         <p:spPr>
           <a:xfrm>
-            <a:off x="8280196" y="5074920"/>
+            <a:off x="8280196" y="4754880"/>
             <a:ext cx="3454298" cy="50800"/>
           </a:xfrm>
           <a:prstGeom prst="rect">
@@ -4284,14 +4220,14 @@
       </p:sp>
       <p:sp>
         <p:nvSpPr>
-          <p:cNvPr id="14" name="TextBox 13"/>
+          <p:cNvPr id="13" name="TextBox 12"/>
           <p:cNvSpPr txBox="1"/>
           <p:nvPr/>
         </p:nvSpPr>
         <p:spPr>
           <a:xfrm>
-            <a:off x="8280196" y="5184648"/>
-            <a:ext cx="3454298" cy="777240"/>
+            <a:off x="8280196" y="4846320"/>
+            <a:ext cx="3454298" cy="640080"/>
           </a:xfrm>
           <a:prstGeom prst="rect">
             <a:avLst/>
@@ -4305,7 +4241,7 @@
           <a:lstStyle/>
           <a:p>
             <a:r>
-              <a:rPr sz="3000" b="1">
+              <a:rPr sz="2700" b="1">
                 <a:solidFill>
                   <a:srgbClr val="0C2E27"/>
                 </a:solidFill>
@@ -4318,14 +4254,14 @@
       </p:sp>
       <p:sp>
         <p:nvSpPr>
-          <p:cNvPr id="15" name="TextBox 14"/>
+          <p:cNvPr id="14" name="TextBox 13"/>
           <p:cNvSpPr txBox="1"/>
           <p:nvPr/>
         </p:nvSpPr>
         <p:spPr>
           <a:xfrm>
-            <a:off x="8280196" y="5943600"/>
-            <a:ext cx="3454298" cy="502920"/>
+            <a:off x="8280196" y="5468112"/>
+            <a:ext cx="3454298" cy="1417320"/>
           </a:xfrm>
           <a:prstGeom prst="rect">
             <a:avLst/>
@@ -4339,13 +4275,13 @@
           <a:lstStyle/>
           <a:p>
             <a:r>
-              <a:rPr sz="1200" b="0">
+              <a:rPr sz="1100" b="0">
                 <a:solidFill>
                   <a:srgbClr val="7A828C"/>
                 </a:solidFill>
                 <a:latin typeface="Calibri"/>
               </a:rPr>
-              <a:t>R&amp;D</a:t>
+              <a:t>R&amp;D and Sales both declined from prior period</a:t>
             </a:r>
           </a:p>
         </p:txBody>
@@ -4397,6 +4333,344 @@
                 </a:solidFill>
                 <a:latin typeface="Calibri"/>
               </a:rPr>
+              <a:t>CATEGORY BREAKDOWN</a:t>
+            </a:r>
+          </a:p>
+        </p:txBody>
+      </p:sp>
+      <p:sp>
+        <p:nvSpPr>
+          <p:cNvPr id="3" name="TextBox 2"/>
+          <p:cNvSpPr txBox="1"/>
+          <p:nvPr/>
+        </p:nvSpPr>
+        <p:spPr>
+          <a:xfrm>
+            <a:off x="457200" y="585216"/>
+            <a:ext cx="11277295" cy="1005840"/>
+          </a:xfrm>
+          <a:prstGeom prst="rect">
+            <a:avLst/>
+          </a:prstGeom>
+          <a:noFill/>
+        </p:spPr>
+        <p:txBody>
+          <a:bodyPr wrap="square">
+            <a:spAutoFit/>
+          </a:bodyPr>
+          <a:lstStyle/>
+          <a:p>
+            <a:r>
+              <a:rPr sz="3000" b="1">
+                <a:solidFill>
+                  <a:srgbClr val="0C2E27"/>
+                </a:solidFill>
+                <a:latin typeface="Cambria"/>
+              </a:rPr>
+              <a:t>Salaries &amp; Wages at $231k dominate, while Software &amp; Cloud increased by $2k.</a:t>
+            </a:r>
+          </a:p>
+        </p:txBody>
+      </p:sp>
+      <p:sp>
+        <p:nvSpPr>
+          <p:cNvPr id="4" name="TextBox 3"/>
+          <p:cNvSpPr txBox="1"/>
+          <p:nvPr/>
+        </p:nvSpPr>
+        <p:spPr>
+          <a:xfrm>
+            <a:off x="457200" y="6473952"/>
+            <a:ext cx="11277295" cy="274320"/>
+          </a:xfrm>
+          <a:prstGeom prst="rect">
+            <a:avLst/>
+          </a:prstGeom>
+          <a:noFill/>
+        </p:spPr>
+        <p:txBody>
+          <a:bodyPr wrap="square">
+            <a:spAutoFit/>
+          </a:bodyPr>
+          <a:lstStyle/>
+          <a:p>
+            <a:r>
+              <a:rPr sz="900" b="0">
+                <a:solidFill>
+                  <a:srgbClr val="7A828C"/>
+                </a:solidFill>
+                <a:latin typeface="Calibri"/>
+              </a:rPr>
+              <a:t>Source: dim_category: actual by category (2026-05), verified against the data.</a:t>
+            </a:r>
+          </a:p>
+        </p:txBody>
+      </p:sp>
+      <p:pic>
+        <p:nvPicPr>
+          <p:cNvPr id="5" name="Picture 4" descr="chart_2.png"/>
+          <p:cNvPicPr>
+            <a:picLocks noChangeAspect="1"/>
+          </p:cNvPicPr>
+          <p:nvPr/>
+        </p:nvPicPr>
+        <p:blipFill>
+          <a:blip r:embed="rId2"/>
+          <a:stretch>
+            <a:fillRect/>
+          </a:stretch>
+        </p:blipFill>
+        <p:spPr>
+          <a:xfrm>
+            <a:off x="457200" y="1783080"/>
+            <a:ext cx="6949440" cy="3563815"/>
+          </a:xfrm>
+          <a:prstGeom prst="rect">
+            <a:avLst/>
+          </a:prstGeom>
+        </p:spPr>
+      </p:pic>
+      <p:sp>
+        <p:nvSpPr>
+          <p:cNvPr id="6" name="TextBox 5"/>
+          <p:cNvSpPr txBox="1"/>
+          <p:nvPr/>
+        </p:nvSpPr>
+        <p:spPr>
+          <a:xfrm>
+            <a:off x="457200" y="5486400"/>
+            <a:ext cx="6949440" cy="868680"/>
+          </a:xfrm>
+          <a:prstGeom prst="rect">
+            <a:avLst/>
+          </a:prstGeom>
+          <a:noFill/>
+        </p:spPr>
+        <p:txBody>
+          <a:bodyPr wrap="square">
+            <a:spAutoFit/>
+          </a:bodyPr>
+          <a:lstStyle/>
+          <a:p>
+            <a:r>
+              <a:rPr sz="1100" b="0">
+                <a:solidFill>
+                  <a:srgbClr val="7A828C"/>
+                </a:solidFill>
+                <a:latin typeface="Calibri"/>
+              </a:rPr>
+              <a:t>In May 2026, Salaries &amp; Wages lead with $231k, representing 44.8% of total spend. Software &amp; Cloud saw the largest increase, rising by $2k to $94k, indicating a growing investment in technology. Other categories such as Contractors and Travel &amp; Events remain significant but show less concentration compared to the top two categories.</a:t>
+            </a:r>
+          </a:p>
+        </p:txBody>
+      </p:sp>
+      <p:sp>
+        <p:nvSpPr>
+          <p:cNvPr id="7" name="Rectangle 6"/>
+          <p:cNvSpPr/>
+          <p:nvPr/>
+        </p:nvSpPr>
+        <p:spPr>
+          <a:xfrm>
+            <a:off x="7772400" y="1783080"/>
+            <a:ext cx="3931920" cy="457200"/>
+          </a:xfrm>
+          <a:prstGeom prst="rect">
+            <a:avLst/>
+          </a:prstGeom>
+          <a:solidFill>
+            <a:srgbClr val="0C2E27"/>
+          </a:solidFill>
+          <a:ln>
+            <a:noFill/>
+          </a:ln>
+          <a:effectLst/>
+        </p:spPr>
+        <p:style>
+          <a:lnRef idx="1">
+            <a:schemeClr val="accent1"/>
+          </a:lnRef>
+          <a:fillRef idx="3">
+            <a:schemeClr val="accent1"/>
+          </a:fillRef>
+          <a:effectRef idx="2">
+            <a:schemeClr val="accent1"/>
+          </a:effectRef>
+          <a:fontRef idx="minor">
+            <a:schemeClr val="lt1"/>
+          </a:fontRef>
+        </p:style>
+        <p:txBody>
+          <a:bodyPr rtlCol="0" anchor="ctr" lIns="201168" tIns="18288" bIns="18288"/>
+          <a:lstStyle/>
+          <a:p>
+            <a:pPr algn="ctr"/>
+            <a:r>
+              <a:rPr sz="1200" b="1">
+                <a:solidFill>
+                  <a:srgbClr val="FFFFFF"/>
+                </a:solidFill>
+                <a:latin typeface="Calibri"/>
+              </a:rPr>
+              <a:t>KEY TAKEAWAY</a:t>
+            </a:r>
+          </a:p>
+        </p:txBody>
+      </p:sp>
+      <p:sp>
+        <p:nvSpPr>
+          <p:cNvPr id="8" name="Rectangle 7"/>
+          <p:cNvSpPr/>
+          <p:nvPr/>
+        </p:nvSpPr>
+        <p:spPr>
+          <a:xfrm>
+            <a:off x="7772400" y="2240280"/>
+            <a:ext cx="3931920" cy="3200400"/>
+          </a:xfrm>
+          <a:prstGeom prst="rect">
+            <a:avLst/>
+          </a:prstGeom>
+          <a:solidFill>
+            <a:srgbClr val="E6E8EB"/>
+          </a:solidFill>
+          <a:ln w="9525">
+            <a:solidFill>
+              <a:srgbClr val="C0C5C9"/>
+            </a:solidFill>
+          </a:ln>
+          <a:effectLst/>
+        </p:spPr>
+        <p:style>
+          <a:lnRef idx="1">
+            <a:schemeClr val="accent1"/>
+          </a:lnRef>
+          <a:fillRef idx="3">
+            <a:schemeClr val="accent1"/>
+          </a:fillRef>
+          <a:effectRef idx="2">
+            <a:schemeClr val="accent1"/>
+          </a:effectRef>
+          <a:fontRef idx="minor">
+            <a:schemeClr val="lt1"/>
+          </a:fontRef>
+        </p:style>
+        <p:txBody>
+          <a:bodyPr rtlCol="0" anchor="t" wrap="square" lIns="219456" rIns="219456" tIns="237744"/>
+          <a:lstStyle/>
+          <a:p>
+            <a:pPr algn="l">
+              <a:spcAft>
+                <a:spcPts val="1600"/>
+              </a:spcAft>
+            </a:pPr>
+            <a:r>
+              <a:rPr sz="1300" b="0">
+                <a:solidFill>
+                  <a:srgbClr val="3C4450"/>
+                </a:solidFill>
+                <a:latin typeface="Calibri"/>
+              </a:rPr>
+              <a:t>Focusing on Salaries &amp; Wages and Software &amp; Cloud will drive strategic resource allocation.</a:t>
+            </a:r>
+          </a:p>
+          <a:p>
+            <a:pPr algn="l">
+              <a:spcAft>
+                <a:spcPts val="700"/>
+              </a:spcAft>
+            </a:pPr>
+            <a:r>
+              <a:rPr sz="1100" b="0">
+                <a:solidFill>
+                  <a:srgbClr val="3C4450"/>
+                </a:solidFill>
+                <a:latin typeface="Calibri"/>
+              </a:rPr>
+              <a:t>•  Salaries &amp; Wages account for nearly half of total spend at $231k.</a:t>
+            </a:r>
+          </a:p>
+          <a:p>
+            <a:pPr algn="l">
+              <a:spcAft>
+                <a:spcPts val="700"/>
+              </a:spcAft>
+            </a:pPr>
+            <a:r>
+              <a:rPr sz="1100" b="0">
+                <a:solidFill>
+                  <a:srgbClr val="3C4450"/>
+                </a:solidFill>
+                <a:latin typeface="Calibri"/>
+              </a:rPr>
+              <a:t>•  Software &amp; Cloud is the biggest mover, increasing by $2k to $94k.</a:t>
+            </a:r>
+          </a:p>
+          <a:p>
+            <a:pPr algn="l">
+              <a:spcAft>
+                <a:spcPts val="700"/>
+              </a:spcAft>
+            </a:pPr>
+            <a:r>
+              <a:rPr sz="1100" b="0">
+                <a:solidFill>
+                  <a:srgbClr val="3C4450"/>
+                </a:solidFill>
+                <a:latin typeface="Calibri"/>
+              </a:rPr>
+              <a:t>•  Overall spend remains concentrated in a few key categories. </a:t>
+            </a:r>
+          </a:p>
+        </p:txBody>
+      </p:sp>
+    </p:spTree>
+  </p:cSld>
+  <p:clrMapOvr>
+    <a:masterClrMapping/>
+  </p:clrMapOvr>
+</p:sld>
+</file>
+
+<file path=ppt/slides/slide6.xml><?xml version="1.0" encoding="utf-8"?>
+<p:sld xmlns:a="http://schemas.openxmlformats.org/drawingml/2006/main" xmlns:p="http://schemas.openxmlformats.org/presentationml/2006/main" xmlns:r="http://schemas.openxmlformats.org/officeDocument/2006/relationships">
+  <p:cSld>
+    <p:spTree>
+      <p:nvGrpSpPr>
+        <p:cNvPr id="1" name=""/>
+        <p:cNvGrpSpPr/>
+        <p:nvPr/>
+      </p:nvGrpSpPr>
+      <p:grpSpPr/>
+      <p:sp>
+        <p:nvSpPr>
+          <p:cNvPr id="2" name="TextBox 1"/>
+          <p:cNvSpPr txBox="1"/>
+          <p:nvPr/>
+        </p:nvSpPr>
+        <p:spPr>
+          <a:xfrm>
+            <a:off x="457200" y="292608"/>
+            <a:ext cx="11277295" cy="274320"/>
+          </a:xfrm>
+          <a:prstGeom prst="rect">
+            <a:avLst/>
+          </a:prstGeom>
+          <a:noFill/>
+        </p:spPr>
+        <p:txBody>
+          <a:bodyPr wrap="square">
+            <a:spAutoFit/>
+          </a:bodyPr>
+          <a:lstStyle/>
+          <a:p>
+            <a:r>
+              <a:rPr sz="1300" b="1">
+                <a:solidFill>
+                  <a:srgbClr val="0E7C66"/>
+                </a:solidFill>
+                <a:latin typeface="Calibri"/>
+              </a:rPr>
               <a:t>RECOMMENDATIONS</a:t>
             </a:r>
           </a:p>
@@ -4504,7 +4778,7 @@
                 </a:solidFill>
                 <a:latin typeface="Calibri"/>
               </a:rPr>
-              <a:t>1.   Increase Sales initiatives to capitalize on $147k contribution, representing 29.3% of total actual.</a:t>
+              <a:t>1.   Analyze Sales performance to identify drivers behind the $5k decline and implement corrective actions.</a:t>
             </a:r>
           </a:p>
           <a:p>
@@ -4520,7 +4794,7 @@
                 </a:solidFill>
                 <a:latin typeface="Calibri"/>
               </a:rPr>
-              <a:t>2.   Investigate Operations' decline of -$8k to identify root causes and implement corrective actions.</a:t>
+              <a:t>2.   Review Salaries &amp; Wages expenditures to optimize costs and address the $2k decrease.</a:t>
             </a:r>
           </a:p>
           <a:p>
@@ -4536,7 +4810,7 @@
                 </a:solidFill>
                 <a:latin typeface="Calibri"/>
               </a:rPr>
-              <a:t>3.   Reassess budget allocations to prioritize departments with positive performance trends and mitigate declines.</a:t>
+              <a:t>3.   Enhance sales training programs to boost productivity and recover the $5k loss in Sales.</a:t>
             </a:r>
           </a:p>
           <a:p>
@@ -4552,7 +4826,7 @@
                 </a:solidFill>
                 <a:latin typeface="Calibri"/>
               </a:rPr>
-              <a:t>4.   Enhance cross-department collaboration to leverage Sales strategies in Operations for improved performance.</a:t>
+              <a:t>4.   Reallocate resources from underperforming areas to support Sales and improve overall financial performance.</a:t>
             </a:r>
           </a:p>
         </p:txBody>

--- a/app/examples/fpa_budget/report.pptx
+++ b/app/examples/fpa_budget/report.pptx
@@ -3118,11 +3118,11 @@
             <a:r>
               <a:rPr sz="4600" b="1">
                 <a:solidFill>
-                  <a:srgbClr val="0C2E27"/>
+                  <a:srgbClr val="14503B"/>
                 </a:solidFill>
                 <a:latin typeface="Cambria"/>
               </a:rPr>
-              <a:t>May Financial Performance Analysis</a:t>
+              <a:t>May Financial Performance Overview</a:t>
             </a:r>
           </a:p>
         </p:txBody>
@@ -3282,11 +3282,11 @@
             <a:r>
               <a:rPr sz="3000" b="1">
                 <a:solidFill>
-                  <a:srgbClr val="0C2E27"/>
+                  <a:srgbClr val="14503B"/>
                 </a:solidFill>
                 <a:latin typeface="Cambria"/>
               </a:rPr>
-              <a:t>Stable total actual indicates consistent financial health despite minor declines.</a:t>
+              <a:t>Stable total actuals indicate consistent financial health despite minor declines.</a:t>
             </a:r>
           </a:p>
         </p:txBody>
@@ -3439,7 +3439,7 @@
                 </a:solidFill>
                 <a:latin typeface="Calibri"/>
               </a:rPr>
-              <a:t>Salaries &amp; Wages dominate at $231k, making up 44.8% of total actual.</a:t>
+              <a:t>Salaries &amp; Wages is the top category at $231k, making up 44.8% of total.</a:t>
             </a:r>
           </a:p>
           <a:p>
@@ -3463,7 +3463,7 @@
                 </a:solidFill>
                 <a:latin typeface="Calibri"/>
               </a:rPr>
-              <a:t>Salaries &amp; Wages decreased by -$2k from the previous month.</a:t>
+              <a:t>Salaries &amp; Wages declined by -$2k versus the prior month.</a:t>
             </a:r>
           </a:p>
         </p:txBody>
@@ -3545,7 +3545,7 @@
             <a:r>
               <a:rPr sz="3000" b="1">
                 <a:solidFill>
-                  <a:srgbClr val="0C2E27"/>
+                  <a:srgbClr val="14503B"/>
                 </a:solidFill>
                 <a:latin typeface="Cambria"/>
               </a:rPr>
@@ -3604,8 +3604,8 @@
         </p:blipFill>
         <p:spPr>
           <a:xfrm>
-            <a:off x="457200" y="1783080"/>
-            <a:ext cx="6949440" cy="3563815"/>
+            <a:off x="914400" y="1554480"/>
+            <a:ext cx="10332720" cy="3061547"/>
           </a:xfrm>
           <a:prstGeom prst="rect">
             <a:avLst/>
@@ -3614,54 +3614,20 @@
       </p:pic>
       <p:sp>
         <p:nvSpPr>
-          <p:cNvPr id="6" name="TextBox 5"/>
-          <p:cNvSpPr txBox="1"/>
-          <p:nvPr/>
-        </p:nvSpPr>
-        <p:spPr>
-          <a:xfrm>
-            <a:off x="457200" y="5486400"/>
-            <a:ext cx="6949440" cy="868680"/>
-          </a:xfrm>
-          <a:prstGeom prst="rect">
-            <a:avLst/>
-          </a:prstGeom>
-          <a:noFill/>
-        </p:spPr>
-        <p:txBody>
-          <a:bodyPr wrap="square">
-            <a:spAutoFit/>
-          </a:bodyPr>
-          <a:lstStyle/>
-          <a:p>
-            <a:r>
-              <a:rPr sz="1100" b="0">
-                <a:solidFill>
-                  <a:srgbClr val="7A828C"/>
-                </a:solidFill>
-                <a:latin typeface="Calibri"/>
-              </a:rPr>
-              <a:t>In May 2026, actual totaled $517k, consistent with April's figure of $517k, reflecting a slight decrease of -0.1%. The recent trend shows a peak month of $530k in February 2026, followed by a gradual decline to the current level. This stability indicates a potential seasonal pattern as we approach the mid-year mark.</a:t>
-            </a:r>
-          </a:p>
-        </p:txBody>
-      </p:sp>
-      <p:sp>
-        <p:nvSpPr>
-          <p:cNvPr id="7" name="Rectangle 6"/>
+          <p:cNvPr id="6" name="Rectangle 5"/>
           <p:cNvSpPr/>
           <p:nvPr/>
         </p:nvSpPr>
         <p:spPr>
           <a:xfrm>
-            <a:off x="7772400" y="1783080"/>
-            <a:ext cx="3931920" cy="457200"/>
+            <a:off x="457200" y="4754880"/>
+            <a:ext cx="2510713" cy="50800"/>
           </a:xfrm>
           <a:prstGeom prst="rect">
             <a:avLst/>
           </a:prstGeom>
           <a:solidFill>
-            <a:srgbClr val="0C2E27"/>
+            <a:srgbClr val="0E7C66"/>
           </a:solidFill>
           <a:ln>
             <a:noFill/>
@@ -3683,43 +3649,100 @@
           </a:fontRef>
         </p:style>
         <p:txBody>
-          <a:bodyPr rtlCol="0" anchor="ctr" lIns="201168" tIns="18288" bIns="18288"/>
+          <a:bodyPr rtlCol="0" anchor="ctr"/>
           <a:lstStyle/>
           <a:p>
             <a:pPr algn="ctr"/>
-            <a:r>
-              <a:rPr sz="1200" b="1">
-                <a:solidFill>
-                  <a:srgbClr val="FFFFFF"/>
+          </a:p>
+        </p:txBody>
+      </p:sp>
+      <p:sp>
+        <p:nvSpPr>
+          <p:cNvPr id="7" name="TextBox 6"/>
+          <p:cNvSpPr txBox="1"/>
+          <p:nvPr/>
+        </p:nvSpPr>
+        <p:spPr>
+          <a:xfrm>
+            <a:off x="457200" y="4846320"/>
+            <a:ext cx="2510713" cy="640080"/>
+          </a:xfrm>
+          <a:prstGeom prst="rect">
+            <a:avLst/>
+          </a:prstGeom>
+          <a:noFill/>
+        </p:spPr>
+        <p:txBody>
+          <a:bodyPr wrap="square">
+            <a:spAutoFit/>
+          </a:bodyPr>
+          <a:lstStyle/>
+          <a:p>
+            <a:r>
+              <a:rPr sz="2600" b="1">
+                <a:solidFill>
+                  <a:srgbClr val="14503B"/>
+                </a:solidFill>
+                <a:latin typeface="Cambria"/>
+              </a:rPr>
+              <a:t>$517k</a:t>
+            </a:r>
+          </a:p>
+        </p:txBody>
+      </p:sp>
+      <p:sp>
+        <p:nvSpPr>
+          <p:cNvPr id="8" name="TextBox 7"/>
+          <p:cNvSpPr txBox="1"/>
+          <p:nvPr/>
+        </p:nvSpPr>
+        <p:spPr>
+          <a:xfrm>
+            <a:off x="457200" y="5468112"/>
+            <a:ext cx="2510713" cy="1417320"/>
+          </a:xfrm>
+          <a:prstGeom prst="rect">
+            <a:avLst/>
+          </a:prstGeom>
+          <a:noFill/>
+        </p:spPr>
+        <p:txBody>
+          <a:bodyPr wrap="square">
+            <a:spAutoFit/>
+          </a:bodyPr>
+          <a:lstStyle/>
+          <a:p>
+            <a:r>
+              <a:rPr sz="1100" b="0">
+                <a:solidFill>
+                  <a:srgbClr val="7A828C"/>
                 </a:solidFill>
                 <a:latin typeface="Calibri"/>
               </a:rPr>
-              <a:t>KEY TAKEAWAY</a:t>
-            </a:r>
-          </a:p>
-        </p:txBody>
-      </p:sp>
-      <p:sp>
-        <p:nvSpPr>
-          <p:cNvPr id="8" name="Rectangle 7"/>
+              <a:t>Latest month (2026-05)</a:t>
+            </a:r>
+          </a:p>
+        </p:txBody>
+      </p:sp>
+      <p:sp>
+        <p:nvSpPr>
+          <p:cNvPr id="9" name="Rectangle 8"/>
           <p:cNvSpPr/>
           <p:nvPr/>
         </p:nvSpPr>
         <p:spPr>
           <a:xfrm>
-            <a:off x="7772400" y="2240280"/>
-            <a:ext cx="3931920" cy="3200400"/>
+            <a:off x="3379393" y="4754880"/>
+            <a:ext cx="2510713" cy="50800"/>
           </a:xfrm>
           <a:prstGeom prst="rect">
             <a:avLst/>
           </a:prstGeom>
           <a:solidFill>
-            <a:srgbClr val="E6E8EB"/>
+            <a:srgbClr val="0E7C66"/>
           </a:solidFill>
-          <a:ln w="9525">
-            <a:solidFill>
-              <a:srgbClr val="C0C5C9"/>
-            </a:solidFill>
+          <a:ln>
+            <a:noFill/>
           </a:ln>
           <a:effectLst/>
         </p:spPr>
@@ -3738,70 +3761,301 @@
           </a:fontRef>
         </p:style>
         <p:txBody>
-          <a:bodyPr rtlCol="0" anchor="t" wrap="square" lIns="219456" rIns="219456" tIns="237744"/>
-          <a:lstStyle/>
-          <a:p>
-            <a:pPr algn="l">
-              <a:spcAft>
-                <a:spcPts val="1600"/>
-              </a:spcAft>
-            </a:pPr>
-            <a:r>
-              <a:rPr sz="1300" b="0">
-                <a:solidFill>
-                  <a:srgbClr val="3C4450"/>
+          <a:bodyPr rtlCol="0" anchor="ctr"/>
+          <a:lstStyle/>
+          <a:p>
+            <a:pPr algn="ctr"/>
+          </a:p>
+        </p:txBody>
+      </p:sp>
+      <p:sp>
+        <p:nvSpPr>
+          <p:cNvPr id="10" name="TextBox 9"/>
+          <p:cNvSpPr txBox="1"/>
+          <p:nvPr/>
+        </p:nvSpPr>
+        <p:spPr>
+          <a:xfrm>
+            <a:off x="3379393" y="4846320"/>
+            <a:ext cx="2510713" cy="640080"/>
+          </a:xfrm>
+          <a:prstGeom prst="rect">
+            <a:avLst/>
+          </a:prstGeom>
+          <a:noFill/>
+        </p:spPr>
+        <p:txBody>
+          <a:bodyPr wrap="square">
+            <a:spAutoFit/>
+          </a:bodyPr>
+          <a:lstStyle/>
+          <a:p>
+            <a:r>
+              <a:rPr sz="2600" b="1">
+                <a:solidFill>
+                  <a:srgbClr val="14503B"/>
+                </a:solidFill>
+                <a:latin typeface="Cambria"/>
+              </a:rPr>
+              <a:t>$530k</a:t>
+            </a:r>
+          </a:p>
+        </p:txBody>
+      </p:sp>
+      <p:sp>
+        <p:nvSpPr>
+          <p:cNvPr id="11" name="TextBox 10"/>
+          <p:cNvSpPr txBox="1"/>
+          <p:nvPr/>
+        </p:nvSpPr>
+        <p:spPr>
+          <a:xfrm>
+            <a:off x="3379393" y="5468112"/>
+            <a:ext cx="2510713" cy="1417320"/>
+          </a:xfrm>
+          <a:prstGeom prst="rect">
+            <a:avLst/>
+          </a:prstGeom>
+          <a:noFill/>
+        </p:spPr>
+        <p:txBody>
+          <a:bodyPr wrap="square">
+            <a:spAutoFit/>
+          </a:bodyPr>
+          <a:lstStyle/>
+          <a:p>
+            <a:r>
+              <a:rPr sz="1100" b="0">
+                <a:solidFill>
+                  <a:srgbClr val="7A828C"/>
                 </a:solidFill>
                 <a:latin typeface="Calibri"/>
               </a:rPr>
-              <a:t>Maintaining $517k suggests resilience in performance despite recent fluctuations.</a:t>
-            </a:r>
-          </a:p>
-          <a:p>
-            <a:pPr algn="l">
-              <a:spcAft>
-                <a:spcPts val="700"/>
-              </a:spcAft>
-            </a:pPr>
+              <a:t>Peak month (2026-02)</a:t>
+            </a:r>
+          </a:p>
+        </p:txBody>
+      </p:sp>
+      <p:sp>
+        <p:nvSpPr>
+          <p:cNvPr id="12" name="Rectangle 11"/>
+          <p:cNvSpPr/>
+          <p:nvPr/>
+        </p:nvSpPr>
+        <p:spPr>
+          <a:xfrm>
+            <a:off x="6301587" y="4754880"/>
+            <a:ext cx="2510713" cy="50800"/>
+          </a:xfrm>
+          <a:prstGeom prst="rect">
+            <a:avLst/>
+          </a:prstGeom>
+          <a:solidFill>
+            <a:srgbClr val="0E7C66"/>
+          </a:solidFill>
+          <a:ln>
+            <a:noFill/>
+          </a:ln>
+          <a:effectLst/>
+        </p:spPr>
+        <p:style>
+          <a:lnRef idx="1">
+            <a:schemeClr val="accent1"/>
+          </a:lnRef>
+          <a:fillRef idx="3">
+            <a:schemeClr val="accent1"/>
+          </a:fillRef>
+          <a:effectRef idx="2">
+            <a:schemeClr val="accent1"/>
+          </a:effectRef>
+          <a:fontRef idx="minor">
+            <a:schemeClr val="lt1"/>
+          </a:fontRef>
+        </p:style>
+        <p:txBody>
+          <a:bodyPr rtlCol="0" anchor="ctr"/>
+          <a:lstStyle/>
+          <a:p>
+            <a:pPr algn="ctr"/>
+          </a:p>
+        </p:txBody>
+      </p:sp>
+      <p:sp>
+        <p:nvSpPr>
+          <p:cNvPr id="13" name="TextBox 12"/>
+          <p:cNvSpPr txBox="1"/>
+          <p:nvPr/>
+        </p:nvSpPr>
+        <p:spPr>
+          <a:xfrm>
+            <a:off x="6301587" y="4846320"/>
+            <a:ext cx="2510713" cy="640080"/>
+          </a:xfrm>
+          <a:prstGeom prst="rect">
+            <a:avLst/>
+          </a:prstGeom>
+          <a:noFill/>
+        </p:spPr>
+        <p:txBody>
+          <a:bodyPr wrap="square">
+            <a:spAutoFit/>
+          </a:bodyPr>
+          <a:lstStyle/>
+          <a:p>
+            <a:r>
+              <a:rPr sz="2600" b="1">
+                <a:solidFill>
+                  <a:srgbClr val="14503B"/>
+                </a:solidFill>
+                <a:latin typeface="Cambria"/>
+              </a:rPr>
+              <a:t>$484k</a:t>
+            </a:r>
+          </a:p>
+        </p:txBody>
+      </p:sp>
+      <p:sp>
+        <p:nvSpPr>
+          <p:cNvPr id="14" name="TextBox 13"/>
+          <p:cNvSpPr txBox="1"/>
+          <p:nvPr/>
+        </p:nvSpPr>
+        <p:spPr>
+          <a:xfrm>
+            <a:off x="6301587" y="5468112"/>
+            <a:ext cx="2510713" cy="1417320"/>
+          </a:xfrm>
+          <a:prstGeom prst="rect">
+            <a:avLst/>
+          </a:prstGeom>
+          <a:noFill/>
+        </p:spPr>
+        <p:txBody>
+          <a:bodyPr wrap="square">
+            <a:spAutoFit/>
+          </a:bodyPr>
+          <a:lstStyle/>
+          <a:p>
             <a:r>
               <a:rPr sz="1100" b="0">
                 <a:solidFill>
-                  <a:srgbClr val="3C4450"/>
+                  <a:srgbClr val="7A828C"/>
                 </a:solidFill>
                 <a:latin typeface="Calibri"/>
               </a:rPr>
-              <a:t>•  Actual in May 2026 is $517k, unchanged from April 2026.</a:t>
-            </a:r>
-          </a:p>
-          <a:p>
-            <a:pPr algn="l">
-              <a:spcAft>
-                <a:spcPts val="700"/>
-              </a:spcAft>
-            </a:pPr>
+              <a:t>Lowest month (2025-06)</a:t>
+            </a:r>
+          </a:p>
+        </p:txBody>
+      </p:sp>
+      <p:sp>
+        <p:nvSpPr>
+          <p:cNvPr id="15" name="Rectangle 14"/>
+          <p:cNvSpPr/>
+          <p:nvPr/>
+        </p:nvSpPr>
+        <p:spPr>
+          <a:xfrm>
+            <a:off x="9223781" y="4754880"/>
+            <a:ext cx="2510713" cy="50800"/>
+          </a:xfrm>
+          <a:prstGeom prst="rect">
+            <a:avLst/>
+          </a:prstGeom>
+          <a:solidFill>
+            <a:srgbClr val="0E7C66"/>
+          </a:solidFill>
+          <a:ln>
+            <a:noFill/>
+          </a:ln>
+          <a:effectLst/>
+        </p:spPr>
+        <p:style>
+          <a:lnRef idx="1">
+            <a:schemeClr val="accent1"/>
+          </a:lnRef>
+          <a:fillRef idx="3">
+            <a:schemeClr val="accent1"/>
+          </a:fillRef>
+          <a:effectRef idx="2">
+            <a:schemeClr val="accent1"/>
+          </a:effectRef>
+          <a:fontRef idx="minor">
+            <a:schemeClr val="lt1"/>
+          </a:fontRef>
+        </p:style>
+        <p:txBody>
+          <a:bodyPr rtlCol="0" anchor="ctr"/>
+          <a:lstStyle/>
+          <a:p>
+            <a:pPr algn="ctr"/>
+          </a:p>
+        </p:txBody>
+      </p:sp>
+      <p:sp>
+        <p:nvSpPr>
+          <p:cNvPr id="16" name="TextBox 15"/>
+          <p:cNvSpPr txBox="1"/>
+          <p:nvPr/>
+        </p:nvSpPr>
+        <p:spPr>
+          <a:xfrm>
+            <a:off x="9223781" y="4846320"/>
+            <a:ext cx="2510713" cy="640080"/>
+          </a:xfrm>
+          <a:prstGeom prst="rect">
+            <a:avLst/>
+          </a:prstGeom>
+          <a:noFill/>
+        </p:spPr>
+        <p:txBody>
+          <a:bodyPr wrap="square">
+            <a:spAutoFit/>
+          </a:bodyPr>
+          <a:lstStyle/>
+          <a:p>
+            <a:r>
+              <a:rPr sz="2600" b="1">
+                <a:solidFill>
+                  <a:srgbClr val="14503B"/>
+                </a:solidFill>
+                <a:latin typeface="Cambria"/>
+              </a:rPr>
+              <a:t>+$32k</a:t>
+            </a:r>
+          </a:p>
+        </p:txBody>
+      </p:sp>
+      <p:sp>
+        <p:nvSpPr>
+          <p:cNvPr id="17" name="TextBox 16"/>
+          <p:cNvSpPr txBox="1"/>
+          <p:nvPr/>
+        </p:nvSpPr>
+        <p:spPr>
+          <a:xfrm>
+            <a:off x="9223781" y="5468112"/>
+            <a:ext cx="2510713" cy="1417320"/>
+          </a:xfrm>
+          <a:prstGeom prst="rect">
+            <a:avLst/>
+          </a:prstGeom>
+          <a:noFill/>
+        </p:spPr>
+        <p:txBody>
+          <a:bodyPr wrap="square">
+            <a:spAutoFit/>
+          </a:bodyPr>
+          <a:lstStyle/>
+          <a:p>
             <a:r>
               <a:rPr sz="1100" b="0">
                 <a:solidFill>
-                  <a:srgbClr val="3C4450"/>
+                  <a:srgbClr val="7A828C"/>
                 </a:solidFill>
                 <a:latin typeface="Calibri"/>
               </a:rPr>
-              <a:t>•  The peak month was $530k in February 2026.</a:t>
-            </a:r>
-          </a:p>
-          <a:p>
-            <a:pPr algn="l">
-              <a:spcAft>
-                <a:spcPts val="700"/>
-              </a:spcAft>
-            </a:pPr>
-            <a:r>
-              <a:rPr sz="1100" b="0">
-                <a:solidFill>
-                  <a:srgbClr val="3C4450"/>
-                </a:solidFill>
-                <a:latin typeface="Calibri"/>
-              </a:rPr>
-              <a:t>•  Monthly actuals show fluctuations but overall stability in recent months.</a:t>
+              <a:t>Change since 2025-06</a:t>
             </a:r>
           </a:p>
         </p:txBody>
@@ -3883,11 +4137,11 @@
             <a:r>
               <a:rPr sz="3000" b="1">
                 <a:solidFill>
-                  <a:srgbClr val="0C2E27"/>
+                  <a:srgbClr val="14503B"/>
                 </a:solidFill>
                 <a:latin typeface="Cambria"/>
               </a:rPr>
-              <a:t>Sales leads with $149k, while Customer Success grows by $3k versus last period.</a:t>
+              <a:t>Sales leads with $149k, but decreased by -$5k from last month.</a:t>
             </a:r>
           </a:p>
         </p:txBody>
@@ -3942,8 +4196,8 @@
         </p:blipFill>
         <p:spPr>
           <a:xfrm>
-            <a:off x="914400" y="1554480"/>
-            <a:ext cx="10332720" cy="3061547"/>
+            <a:off x="457200" y="1783080"/>
+            <a:ext cx="6949440" cy="3563815"/>
           </a:xfrm>
           <a:prstGeom prst="rect">
             <a:avLst/>
@@ -3952,20 +4206,54 @@
       </p:pic>
       <p:sp>
         <p:nvSpPr>
-          <p:cNvPr id="6" name="Rectangle 5"/>
+          <p:cNvPr id="6" name="TextBox 5"/>
+          <p:cNvSpPr txBox="1"/>
+          <p:nvPr/>
+        </p:nvSpPr>
+        <p:spPr>
+          <a:xfrm>
+            <a:off x="457200" y="5486400"/>
+            <a:ext cx="6949440" cy="868680"/>
+          </a:xfrm>
+          <a:prstGeom prst="rect">
+            <a:avLst/>
+          </a:prstGeom>
+          <a:noFill/>
+        </p:spPr>
+        <p:txBody>
+          <a:bodyPr wrap="square">
+            <a:spAutoFit/>
+          </a:bodyPr>
+          <a:lstStyle/>
+          <a:p>
+            <a:r>
+              <a:rPr sz="1100" b="0">
+                <a:solidFill>
+                  <a:srgbClr val="7A828C"/>
+                </a:solidFill>
+                <a:latin typeface="Calibri"/>
+              </a:rPr>
+              <a:t>In May 2026, the Sales department leads with a total of $149k, representing a significant portion of the overall departmental spend. However, it experienced a decline of -$5k compared to April 2026. Customer Success is the biggest mover, increasing by +$2k to reach $65k, reflecting a positive trend in that area.</a:t>
+            </a:r>
+          </a:p>
+        </p:txBody>
+      </p:sp>
+      <p:sp>
+        <p:nvSpPr>
+          <p:cNvPr id="7" name="Rectangle 6"/>
           <p:cNvSpPr/>
           <p:nvPr/>
         </p:nvSpPr>
         <p:spPr>
           <a:xfrm>
-            <a:off x="457200" y="4754880"/>
-            <a:ext cx="3454298" cy="50800"/>
+            <a:off x="7772400" y="1783080"/>
+            <a:ext cx="3931920" cy="457200"/>
           </a:xfrm>
           <a:prstGeom prst="rect">
             <a:avLst/>
           </a:prstGeom>
           <a:solidFill>
-            <a:srgbClr val="0E7C66"/>
+            <a:srgbClr val="14503B"/>
           </a:solidFill>
           <a:ln>
             <a:noFill/>
@@ -3987,100 +4275,43 @@
           </a:fontRef>
         </p:style>
         <p:txBody>
-          <a:bodyPr rtlCol="0" anchor="ctr"/>
+          <a:bodyPr rtlCol="0" anchor="ctr" lIns="201168" tIns="18288" bIns="18288"/>
           <a:lstStyle/>
           <a:p>
             <a:pPr algn="ctr"/>
-          </a:p>
-        </p:txBody>
-      </p:sp>
-      <p:sp>
-        <p:nvSpPr>
-          <p:cNvPr id="7" name="TextBox 6"/>
-          <p:cNvSpPr txBox="1"/>
-          <p:nvPr/>
-        </p:nvSpPr>
-        <p:spPr>
-          <a:xfrm>
-            <a:off x="457200" y="4846320"/>
-            <a:ext cx="3454298" cy="640080"/>
-          </a:xfrm>
-          <a:prstGeom prst="rect">
-            <a:avLst/>
-          </a:prstGeom>
-          <a:noFill/>
-        </p:spPr>
-        <p:txBody>
-          <a:bodyPr wrap="square">
-            <a:spAutoFit/>
-          </a:bodyPr>
-          <a:lstStyle/>
-          <a:p>
-            <a:r>
-              <a:rPr sz="2700" b="1">
-                <a:solidFill>
-                  <a:srgbClr val="0C2E27"/>
-                </a:solidFill>
-                <a:latin typeface="Cambria"/>
-              </a:rPr>
-              <a:t>$149k</a:t>
-            </a:r>
-          </a:p>
-        </p:txBody>
-      </p:sp>
-      <p:sp>
-        <p:nvSpPr>
-          <p:cNvPr id="8" name="TextBox 7"/>
-          <p:cNvSpPr txBox="1"/>
-          <p:nvPr/>
-        </p:nvSpPr>
-        <p:spPr>
-          <a:xfrm>
-            <a:off x="457200" y="5468112"/>
-            <a:ext cx="3454298" cy="1417320"/>
-          </a:xfrm>
-          <a:prstGeom prst="rect">
-            <a:avLst/>
-          </a:prstGeom>
-          <a:noFill/>
-        </p:spPr>
-        <p:txBody>
-          <a:bodyPr wrap="square">
-            <a:spAutoFit/>
-          </a:bodyPr>
-          <a:lstStyle/>
-          <a:p>
-            <a:r>
-              <a:rPr sz="1100" b="0">
-                <a:solidFill>
-                  <a:srgbClr val="7A828C"/>
+            <a:r>
+              <a:rPr sz="1200" b="1">
+                <a:solidFill>
+                  <a:srgbClr val="FFFFFF"/>
                 </a:solidFill>
                 <a:latin typeface="Calibri"/>
               </a:rPr>
-              <a:t>Sales: $149k, 28.8% of total spend</a:t>
-            </a:r>
-          </a:p>
-        </p:txBody>
-      </p:sp>
-      <p:sp>
-        <p:nvSpPr>
-          <p:cNvPr id="9" name="Rectangle 8"/>
+              <a:t>KEY TAKEAWAY</a:t>
+            </a:r>
+          </a:p>
+        </p:txBody>
+      </p:sp>
+      <p:sp>
+        <p:nvSpPr>
+          <p:cNvPr id="8" name="Rectangle 7"/>
           <p:cNvSpPr/>
           <p:nvPr/>
         </p:nvSpPr>
         <p:spPr>
           <a:xfrm>
-            <a:off x="4368698" y="4754880"/>
-            <a:ext cx="3454298" cy="50800"/>
+            <a:off x="7772400" y="2240280"/>
+            <a:ext cx="3931920" cy="3200400"/>
           </a:xfrm>
           <a:prstGeom prst="rect">
             <a:avLst/>
           </a:prstGeom>
           <a:solidFill>
-            <a:srgbClr val="0E7C66"/>
+            <a:srgbClr val="E6E8EB"/>
           </a:solidFill>
-          <a:ln>
-            <a:noFill/>
+          <a:ln w="9525">
+            <a:solidFill>
+              <a:srgbClr val="C0C5C9"/>
+            </a:solidFill>
           </a:ln>
           <a:effectLst/>
         </p:spPr>
@@ -4099,189 +4330,70 @@
           </a:fontRef>
         </p:style>
         <p:txBody>
-          <a:bodyPr rtlCol="0" anchor="ctr"/>
-          <a:lstStyle/>
-          <a:p>
-            <a:pPr algn="ctr"/>
-          </a:p>
-        </p:txBody>
-      </p:sp>
-      <p:sp>
-        <p:nvSpPr>
-          <p:cNvPr id="10" name="TextBox 9"/>
-          <p:cNvSpPr txBox="1"/>
-          <p:nvPr/>
-        </p:nvSpPr>
-        <p:spPr>
-          <a:xfrm>
-            <a:off x="4368698" y="4846320"/>
-            <a:ext cx="3454298" cy="640080"/>
-          </a:xfrm>
-          <a:prstGeom prst="rect">
-            <a:avLst/>
-          </a:prstGeom>
-          <a:noFill/>
-        </p:spPr>
-        <p:txBody>
-          <a:bodyPr wrap="square">
-            <a:spAutoFit/>
-          </a:bodyPr>
-          <a:lstStyle/>
-          <a:p>
-            <a:r>
-              <a:rPr sz="2700" b="1">
-                <a:solidFill>
-                  <a:srgbClr val="0C2E27"/>
-                </a:solidFill>
-                <a:latin typeface="Cambria"/>
-              </a:rPr>
-              <a:t>$103k</a:t>
-            </a:r>
-          </a:p>
-        </p:txBody>
-      </p:sp>
-      <p:sp>
-        <p:nvSpPr>
-          <p:cNvPr id="11" name="TextBox 10"/>
-          <p:cNvSpPr txBox="1"/>
-          <p:nvPr/>
-        </p:nvSpPr>
-        <p:spPr>
-          <a:xfrm>
-            <a:off x="4368698" y="5468112"/>
-            <a:ext cx="3454298" cy="1417320"/>
-          </a:xfrm>
-          <a:prstGeom prst="rect">
-            <a:avLst/>
-          </a:prstGeom>
-          <a:noFill/>
-        </p:spPr>
-        <p:txBody>
-          <a:bodyPr wrap="square">
-            <a:spAutoFit/>
-          </a:bodyPr>
-          <a:lstStyle/>
-          <a:p>
-            <a:r>
-              <a:rPr sz="1100" b="0">
-                <a:solidFill>
-                  <a:srgbClr val="7A828C"/>
+          <a:bodyPr rtlCol="0" anchor="t" wrap="square" lIns="219456" rIns="219456" tIns="237744"/>
+          <a:lstStyle/>
+          <a:p>
+            <a:pPr algn="l">
+              <a:spcAft>
+                <a:spcPts val="1600"/>
+              </a:spcAft>
+            </a:pPr>
+            <a:r>
+              <a:rPr sz="1300" b="0">
+                <a:solidFill>
+                  <a:srgbClr val="3C4450"/>
                 </a:solidFill>
                 <a:latin typeface="Calibri"/>
               </a:rPr>
-              <a:t>Customer Success: +$3k growth</a:t>
-            </a:r>
-          </a:p>
-        </p:txBody>
-      </p:sp>
-      <p:sp>
-        <p:nvSpPr>
-          <p:cNvPr id="12" name="Rectangle 11"/>
-          <p:cNvSpPr/>
-          <p:nvPr/>
-        </p:nvSpPr>
-        <p:spPr>
-          <a:xfrm>
-            <a:off x="8280196" y="4754880"/>
-            <a:ext cx="3454298" cy="50800"/>
-          </a:xfrm>
-          <a:prstGeom prst="rect">
-            <a:avLst/>
-          </a:prstGeom>
-          <a:solidFill>
-            <a:srgbClr val="0E7C66"/>
-          </a:solidFill>
-          <a:ln>
-            <a:noFill/>
-          </a:ln>
-          <a:effectLst/>
-        </p:spPr>
-        <p:style>
-          <a:lnRef idx="1">
-            <a:schemeClr val="accent1"/>
-          </a:lnRef>
-          <a:fillRef idx="3">
-            <a:schemeClr val="accent1"/>
-          </a:fillRef>
-          <a:effectRef idx="2">
-            <a:schemeClr val="accent1"/>
-          </a:effectRef>
-          <a:fontRef idx="minor">
-            <a:schemeClr val="lt1"/>
-          </a:fontRef>
-        </p:style>
-        <p:txBody>
-          <a:bodyPr rtlCol="0" anchor="ctr"/>
-          <a:lstStyle/>
-          <a:p>
-            <a:pPr algn="ctr"/>
-          </a:p>
-        </p:txBody>
-      </p:sp>
-      <p:sp>
-        <p:nvSpPr>
-          <p:cNvPr id="13" name="TextBox 12"/>
-          <p:cNvSpPr txBox="1"/>
-          <p:nvPr/>
-        </p:nvSpPr>
-        <p:spPr>
-          <a:xfrm>
-            <a:off x="8280196" y="4846320"/>
-            <a:ext cx="3454298" cy="640080"/>
-          </a:xfrm>
-          <a:prstGeom prst="rect">
-            <a:avLst/>
-          </a:prstGeom>
-          <a:noFill/>
-        </p:spPr>
-        <p:txBody>
-          <a:bodyPr wrap="square">
-            <a:spAutoFit/>
-          </a:bodyPr>
-          <a:lstStyle/>
-          <a:p>
-            <a:r>
-              <a:rPr sz="2700" b="1">
-                <a:solidFill>
-                  <a:srgbClr val="0C2E27"/>
-                </a:solidFill>
-                <a:latin typeface="Cambria"/>
-              </a:rPr>
-              <a:t>$79k</a:t>
-            </a:r>
-          </a:p>
-        </p:txBody>
-      </p:sp>
-      <p:sp>
-        <p:nvSpPr>
-          <p:cNvPr id="14" name="TextBox 13"/>
-          <p:cNvSpPr txBox="1"/>
-          <p:nvPr/>
-        </p:nvSpPr>
-        <p:spPr>
-          <a:xfrm>
-            <a:off x="8280196" y="5468112"/>
-            <a:ext cx="3454298" cy="1417320"/>
-          </a:xfrm>
-          <a:prstGeom prst="rect">
-            <a:avLst/>
-          </a:prstGeom>
-          <a:noFill/>
-        </p:spPr>
-        <p:txBody>
-          <a:bodyPr wrap="square">
-            <a:spAutoFit/>
-          </a:bodyPr>
-          <a:lstStyle/>
-          <a:p>
+              <a:t>The decline in Sales may require strategic focus to reverse the trend.</a:t>
+            </a:r>
+          </a:p>
+          <a:p>
+            <a:pPr algn="l">
+              <a:spcAft>
+                <a:spcPts val="700"/>
+              </a:spcAft>
+            </a:pPr>
             <a:r>
               <a:rPr sz="1100" b="0">
                 <a:solidFill>
-                  <a:srgbClr val="7A828C"/>
+                  <a:srgbClr val="3C4450"/>
                 </a:solidFill>
                 <a:latin typeface="Calibri"/>
               </a:rPr>
-              <a:t>R&amp;D and Sales both declined from prior period</a:t>
+              <a:t>•  Sales at $149k, down -$5k from April.</a:t>
+            </a:r>
+          </a:p>
+          <a:p>
+            <a:pPr algn="l">
+              <a:spcAft>
+                <a:spcPts val="700"/>
+              </a:spcAft>
+            </a:pPr>
+            <a:r>
+              <a:rPr sz="1100" b="0">
+                <a:solidFill>
+                  <a:srgbClr val="3C4450"/>
+                </a:solidFill>
+                <a:latin typeface="Calibri"/>
+              </a:rPr>
+              <a:t>•  Customer Success increased by +$2k to $65k.</a:t>
+            </a:r>
+          </a:p>
+          <a:p>
+            <a:pPr algn="l">
+              <a:spcAft>
+                <a:spcPts val="700"/>
+              </a:spcAft>
+            </a:pPr>
+            <a:r>
+              <a:rPr sz="1100" b="0">
+                <a:solidFill>
+                  <a:srgbClr val="3C4450"/>
+                </a:solidFill>
+                <a:latin typeface="Calibri"/>
+              </a:rPr>
+              <a:t>•  Marketing also saw growth, up +$2k to $79k.</a:t>
             </a:r>
           </a:p>
         </p:txBody>
@@ -4363,11 +4475,11 @@
             <a:r>
               <a:rPr sz="3000" b="1">
                 <a:solidFill>
-                  <a:srgbClr val="0C2E27"/>
+                  <a:srgbClr val="14503B"/>
                 </a:solidFill>
                 <a:latin typeface="Cambria"/>
               </a:rPr>
-              <a:t>Salaries &amp; Wages at $231k dominate, while Software &amp; Cloud increased by $2k.</a:t>
+              <a:t>Salaries &amp; Wages dominate at $231k, with Software &amp; Cloud increasing by $2k.</a:t>
             </a:r>
           </a:p>
         </p:txBody>
@@ -4459,7 +4571,7 @@
                 </a:solidFill>
                 <a:latin typeface="Calibri"/>
               </a:rPr>
-              <a:t>In May 2026, Salaries &amp; Wages lead with $231k, representing 44.8% of total spend. Software &amp; Cloud saw the largest increase, rising by $2k to $94k, indicating a growing investment in technology. Other categories such as Contractors and Travel &amp; Events remain significant but show less concentration compared to the top two categories.</a:t>
+              <a:t>In May 2026, Salaries &amp; Wages led all categories with a total of $231k, representing 44.8% of total spend. Software &amp; Cloud saw the largest increase, rising by $2k to $94k, while Salaries &amp; Wages experienced a decrease of $2k compared to the previous period. This indicates a shift in spending priorities towards technology investments.</a:t>
             </a:r>
           </a:p>
         </p:txBody>
@@ -4479,7 +4591,7 @@
             <a:avLst/>
           </a:prstGeom>
           <a:solidFill>
-            <a:srgbClr val="0C2E27"/>
+            <a:srgbClr val="14503B"/>
           </a:solidFill>
           <a:ln>
             <a:noFill/>
@@ -4571,7 +4683,7 @@
                 </a:solidFill>
                 <a:latin typeface="Calibri"/>
               </a:rPr>
-              <a:t>Focusing on Salaries &amp; Wages and Software &amp; Cloud will drive strategic resource allocation.</a:t>
+              <a:t>The increase in Software &amp; Cloud spending suggests a strategic focus on technology enhancements.</a:t>
             </a:r>
           </a:p>
           <a:p>
@@ -4587,7 +4699,7 @@
                 </a:solidFill>
                 <a:latin typeface="Calibri"/>
               </a:rPr>
-              <a:t>•  Salaries &amp; Wages account for nearly half of total spend at $231k.</a:t>
+              <a:t>•  Salaries &amp; Wages: $231k (44.8% of total)</a:t>
             </a:r>
           </a:p>
           <a:p>
@@ -4603,7 +4715,7 @@
                 </a:solidFill>
                 <a:latin typeface="Calibri"/>
               </a:rPr>
-              <a:t>•  Software &amp; Cloud is the biggest mover, increasing by $2k to $94k.</a:t>
+              <a:t>•  Software &amp; Cloud: $94k, up $2k</a:t>
             </a:r>
           </a:p>
           <a:p>
@@ -4619,7 +4731,7 @@
                 </a:solidFill>
                 <a:latin typeface="Calibri"/>
               </a:rPr>
-              <a:t>•  Overall spend remains concentrated in a few key categories. </a:t>
+              <a:t>•  Travel &amp; Events: $37k, up $224</a:t>
             </a:r>
           </a:p>
         </p:txBody>
@@ -4701,7 +4813,7 @@
             <a:r>
               <a:rPr sz="3000" b="1">
                 <a:solidFill>
-                  <a:srgbClr val="0C2E27"/>
+                  <a:srgbClr val="14503B"/>
                 </a:solidFill>
                 <a:latin typeface="Cambria"/>
               </a:rPr>
@@ -4810,7 +4922,7 @@
                 </a:solidFill>
                 <a:latin typeface="Calibri"/>
               </a:rPr>
-              <a:t>3.   Enhance sales training programs to boost productivity and recover the $5k loss in Sales.</a:t>
+              <a:t>3.   Enhance forecasting methods to mitigate the -0.1% change in total actual and improve future projections.</a:t>
             </a:r>
           </a:p>
           <a:p>
@@ -4826,7 +4938,7 @@
                 </a:solidFill>
                 <a:latin typeface="Calibri"/>
               </a:rPr>
-              <a:t>4.   Reallocate resources from underperforming areas to support Sales and improve overall financial performance.</a:t>
+              <a:t>4.   Prioritize investment in Sales initiatives to regain momentum and boost the department's contribution.</a:t>
             </a:r>
           </a:p>
         </p:txBody>

--- a/app/examples/fpa_budget/report.pptx
+++ b/app/examples/fpa_budget/report.pptx
@@ -3101,8 +3101,8 @@
         </p:nvSpPr>
         <p:spPr>
           <a:xfrm>
-            <a:off x="777240" y="777240"/>
-            <a:ext cx="10607040" cy="1828800"/>
+            <a:off x="777240" y="914400"/>
+            <a:ext cx="10607040" cy="5029200"/>
           </a:xfrm>
           <a:prstGeom prst="rect">
             <a:avLst/>
@@ -3110,11 +3110,16 @@
           <a:noFill/>
         </p:spPr>
         <p:txBody>
-          <a:bodyPr wrap="square">
+          <a:bodyPr wrap="square" anchor="ctr">
             <a:spAutoFit/>
           </a:bodyPr>
           <a:lstStyle/>
           <a:p>
+            <a:pPr>
+              <a:spcAft>
+                <a:spcPts val="1400"/>
+              </a:spcAft>
+            </a:pPr>
             <a:r>
               <a:rPr sz="4600" b="1">
                 <a:solidFill>
@@ -3125,73 +3130,6 @@
               <a:t>May Financial Performance Overview</a:t>
             </a:r>
           </a:p>
-        </p:txBody>
-      </p:sp>
-      <p:sp>
-        <p:nvSpPr>
-          <p:cNvPr id="3" name="Rectangle 2"/>
-          <p:cNvSpPr/>
-          <p:nvPr/>
-        </p:nvSpPr>
-        <p:spPr>
-          <a:xfrm>
-            <a:off x="822960" y="2743200"/>
-            <a:ext cx="1554480" cy="76200"/>
-          </a:xfrm>
-          <a:prstGeom prst="rect">
-            <a:avLst/>
-          </a:prstGeom>
-          <a:solidFill>
-            <a:srgbClr val="0E7C66"/>
-          </a:solidFill>
-          <a:ln>
-            <a:noFill/>
-          </a:ln>
-          <a:effectLst/>
-        </p:spPr>
-        <p:style>
-          <a:lnRef idx="1">
-            <a:schemeClr val="accent1"/>
-          </a:lnRef>
-          <a:fillRef idx="3">
-            <a:schemeClr val="accent1"/>
-          </a:fillRef>
-          <a:effectRef idx="2">
-            <a:schemeClr val="accent1"/>
-          </a:effectRef>
-          <a:fontRef idx="minor">
-            <a:schemeClr val="lt1"/>
-          </a:fontRef>
-        </p:style>
-        <p:txBody>
-          <a:bodyPr rtlCol="0" anchor="ctr"/>
-          <a:lstStyle/>
-          <a:p>
-            <a:pPr algn="ctr"/>
-          </a:p>
-        </p:txBody>
-      </p:sp>
-      <p:sp>
-        <p:nvSpPr>
-          <p:cNvPr id="4" name="TextBox 3"/>
-          <p:cNvSpPr txBox="1"/>
-          <p:nvPr/>
-        </p:nvSpPr>
-        <p:spPr>
-          <a:xfrm>
-            <a:off x="777240" y="2971800"/>
-            <a:ext cx="10607040" cy="548640"/>
-          </a:xfrm>
-          <a:prstGeom prst="rect">
-            <a:avLst/>
-          </a:prstGeom>
-          <a:noFill/>
-        </p:spPr>
-        <p:txBody>
-          <a:bodyPr wrap="square">
-            <a:spAutoFit/>
-          </a:bodyPr>
-          <a:lstStyle/>
           <a:p>
             <a:r>
               <a:rPr sz="1700" b="0">
